--- a/outils/affiches/presentation-testing-event.pptx
+++ b/outils/affiches/presentation-testing-event.pptx
@@ -5677,7 +5677,7 @@
                 </a:solidFill>
                 <a:latin typeface="Barlow Condensed"/>
               </a:rPr>
-              <a:t>LE JEU — UNE FICHE, UNE URNE, TROIS GAGNANTS</a:t>
+              <a:t>LE JEU — CINQ FICHES, UNE URNE, TROIS GAGNANTS</a:t>
             </a:r>
           </a:p>
         </p:txBody>
@@ -5914,7 +5914,7 @@
                 </a:solidFill>
                 <a:latin typeface="Barlow Condensed"/>
               </a:rPr>
-              <a:t>Une fiche</a:t>
+              <a:t>Une fiche par kiosque</a:t>
             </a:r>
           </a:p>
           <a:p>
@@ -5930,7 +5930,7 @@
                 </a:solidFill>
                 <a:latin typeface="Barlow"/>
               </a:rPr>
-              <a:t>Vous recevez une fiche en début d'après-midi.</a:t>
+              <a:t>À chaque kiosque auquel vous assistez, une fiche vous est remise.</a:t>
             </a:r>
           </a:p>
         </p:txBody>
@@ -6098,7 +6098,7 @@
                 </a:solidFill>
                 <a:latin typeface="Barlow Condensed"/>
               </a:rPr>
-              <a:t>Cinq lignes</a:t>
+              <a:t>Vos nom et prénom</a:t>
             </a:r>
           </a:p>
           <a:p>
@@ -6114,7 +6114,7 @@
                 </a:solidFill>
                 <a:latin typeface="Barlow"/>
               </a:rPr>
-              <a:t>À chaque kiosque, vous y inscrivez vos nom et prénom et le numéro du kiosque — cinq fois dans l'après-midi.</a:t>
+              <a:t>Vous y inscrivez vos nom et prénom, et le numéro du kiosque.</a:t>
             </a:r>
           </a:p>
         </p:txBody>
@@ -6298,7 +6298,7 @@
                 </a:solidFill>
                 <a:latin typeface="Barlow"/>
               </a:rPr>
-              <a:t>En fin de parcours, vous déposez votre fiche dans l'urne prévue à cet effet.</a:t>
+              <a:t>Vous déposez la fiche dans l'urne. Cinq kiosques dans l'après-midi, donc cinq fiches.</a:t>
             </a:r>
           </a:p>
         </p:txBody>
@@ -6544,6 +6544,15 @@
                 <a:spcPct val="100000"/>
               </a:lnSpc>
             </a:pPr>
+            <a:r>
+              <a:rPr sz="1300" b="1">
+                <a:solidFill>
+                  <a:srgbClr val="006A6A"/>
+                </a:solidFill>
+                <a:latin typeface="Barlow"/>
+              </a:rPr>
+              <a:t>Cinq fiches déposées, cinq chances au tirage. </a:t>
+            </a:r>
             <a:r>
               <a:rPr sz="1300" b="0">
                 <a:solidFill>

--- a/outils/affiches/presentation-testing-event.pptx
+++ b/outils/affiches/presentation-testing-event.pptx
@@ -3164,7 +3164,7 @@
       </p:sp>
       <p:pic>
         <p:nvPicPr>
-          <p:cNvPr id="4" name="Picture 3" descr="logo-testing-event.png"/>
+          <p:cNvPr id="4" name="Picture 3" descr="couverture-logo.gif"/>
           <p:cNvPicPr>
             <a:picLocks noChangeAspect="1"/>
           </p:cNvPicPr>

--- a/outils/affiches/presentation-testing-event.pptx
+++ b/outils/affiches/presentation-testing-event.pptx
@@ -10531,74 +10531,14 @@
       </p:sp>
       <p:sp>
         <p:nvSpPr>
-          <p:cNvPr id="14" name="Rectangle 13"/>
-          <p:cNvSpPr/>
-          <p:nvPr/>
-        </p:nvSpPr>
-        <p:spPr>
-          <a:xfrm>
-            <a:off x="792000" y="3024000"/>
-            <a:ext cx="5112000" cy="460800"/>
-          </a:xfrm>
-          <a:prstGeom prst="rect">
-            <a:avLst/>
-          </a:prstGeom>
-          <a:solidFill>
-            <a:srgbClr val="FFFFFF"/>
-          </a:solidFill>
-          <a:ln>
-            <a:noFill/>
-          </a:ln>
-          <a:effectLst/>
-        </p:spPr>
-        <p:txBody>
-          <a:bodyPr rtlCol="0" anchor="ctr"/>
-          <a:lstStyle/>
-          <a:p>
-            <a:pPr algn="ctr"/>
-          </a:p>
-        </p:txBody>
-      </p:sp>
-      <p:sp>
-        <p:nvSpPr>
-          <p:cNvPr id="15" name="Rectangle 14"/>
-          <p:cNvSpPr/>
-          <p:nvPr/>
-        </p:nvSpPr>
-        <p:spPr>
-          <a:xfrm>
-            <a:off x="792000" y="3024000"/>
-            <a:ext cx="57600" cy="460800"/>
-          </a:xfrm>
-          <a:prstGeom prst="rect">
-            <a:avLst/>
-          </a:prstGeom>
-          <a:solidFill>
-            <a:srgbClr val="008080"/>
-          </a:solidFill>
-          <a:ln>
-            <a:noFill/>
-          </a:ln>
-          <a:effectLst/>
-        </p:spPr>
-        <p:txBody>
-          <a:bodyPr rtlCol="0" anchor="ctr"/>
-          <a:lstStyle/>
-          <a:p>
-            <a:pPr algn="ctr"/>
-          </a:p>
-        </p:txBody>
-      </p:sp>
-      <p:sp>
-        <p:nvSpPr>
-          <p:cNvPr id="16" name="TextBox 15"/>
+          <p:cNvPr id="14" name="TextBox 13"/>
           <p:cNvSpPr txBox="1"/>
           <p:nvPr/>
         </p:nvSpPr>
         <p:spPr>
           <a:xfrm>
-            <a:off x="1008000" y="3139200"/>
-            <a:ext cx="864000" cy="288000"/>
+            <a:off x="6228000" y="2592000"/>
+            <a:ext cx="5112000" cy="324000"/>
           </a:xfrm>
           <a:prstGeom prst="rect">
             <a:avLst/>
@@ -10617,14 +10557,74 @@
               </a:lnSpc>
             </a:pPr>
             <a:r>
-              <a:rPr sz="1600" b="1">
-                <a:solidFill>
-                  <a:srgbClr val="1A1A2E"/>
+              <a:rPr sz="1700" b="1">
+                <a:solidFill>
+                  <a:srgbClr val="C01020"/>
                 </a:solidFill>
                 <a:latin typeface="Barlow Condensed"/>
               </a:rPr>
-              <a:t>9h00</a:t>
-            </a:r>
+              <a:t>APRÈS-MIDI — KIOSQUES &amp; ATELIERS</a:t>
+            </a:r>
+          </a:p>
+        </p:txBody>
+      </p:sp>
+      <p:sp>
+        <p:nvSpPr>
+          <p:cNvPr id="15" name="Rectangle 14"/>
+          <p:cNvSpPr/>
+          <p:nvPr/>
+        </p:nvSpPr>
+        <p:spPr>
+          <a:xfrm>
+            <a:off x="792000" y="3024000"/>
+            <a:ext cx="990000" cy="367200"/>
+          </a:xfrm>
+          <a:prstGeom prst="rect">
+            <a:avLst/>
+          </a:prstGeom>
+          <a:solidFill>
+            <a:srgbClr val="008080"/>
+          </a:solidFill>
+          <a:ln>
+            <a:noFill/>
+          </a:ln>
+          <a:effectLst/>
+        </p:spPr>
+        <p:txBody>
+          <a:bodyPr rtlCol="0" anchor="ctr"/>
+          <a:lstStyle/>
+          <a:p>
+            <a:pPr algn="ctr"/>
+          </a:p>
+        </p:txBody>
+      </p:sp>
+      <p:sp>
+        <p:nvSpPr>
+          <p:cNvPr id="16" name="Rectangle 15"/>
+          <p:cNvSpPr/>
+          <p:nvPr/>
+        </p:nvSpPr>
+        <p:spPr>
+          <a:xfrm>
+            <a:off x="1782000" y="3024000"/>
+            <a:ext cx="4122000" cy="367200"/>
+          </a:xfrm>
+          <a:prstGeom prst="rect">
+            <a:avLst/>
+          </a:prstGeom>
+          <a:solidFill>
+            <a:srgbClr val="E0F7F7"/>
+          </a:solidFill>
+          <a:ln>
+            <a:noFill/>
+          </a:ln>
+          <a:effectLst/>
+        </p:spPr>
+        <p:txBody>
+          <a:bodyPr rtlCol="0" anchor="ctr"/>
+          <a:lstStyle/>
+          <a:p>
+            <a:pPr algn="ctr"/>
           </a:p>
         </p:txBody>
       </p:sp>
@@ -10636,8 +10636,8 @@
         </p:nvSpPr>
         <p:spPr>
           <a:xfrm>
-            <a:off x="1944000" y="3153600"/>
-            <a:ext cx="3816000" cy="324000"/>
+            <a:off x="792000" y="3096000"/>
+            <a:ext cx="990000" cy="251999"/>
           </a:xfrm>
           <a:prstGeom prst="rect">
             <a:avLst/>
@@ -10650,93 +10650,33 @@
           </a:bodyPr>
           <a:lstStyle/>
           <a:p>
-            <a:pPr algn="l">
-              <a:lnSpc>
-                <a:spcPct val="110000"/>
-              </a:lnSpc>
-            </a:pPr>
-            <a:r>
-              <a:rPr sz="1200" b="0">
-                <a:solidFill>
-                  <a:srgbClr val="1A1A2E"/>
-                </a:solidFill>
-                <a:latin typeface="Barlow"/>
-              </a:rPr>
-              <a:t>Accueil café &amp; petit-déjeuner</a:t>
-            </a:r>
-          </a:p>
-        </p:txBody>
-      </p:sp>
-      <p:sp>
-        <p:nvSpPr>
-          <p:cNvPr id="18" name="Rectangle 17"/>
-          <p:cNvSpPr/>
-          <p:nvPr/>
-        </p:nvSpPr>
-        <p:spPr>
-          <a:xfrm>
-            <a:off x="792000" y="3564000"/>
-            <a:ext cx="5112000" cy="460800"/>
-          </a:xfrm>
-          <a:prstGeom prst="rect">
-            <a:avLst/>
-          </a:prstGeom>
-          <a:solidFill>
-            <a:srgbClr val="FFFFFF"/>
-          </a:solidFill>
-          <a:ln>
-            <a:noFill/>
-          </a:ln>
-          <a:effectLst/>
-        </p:spPr>
-        <p:txBody>
-          <a:bodyPr rtlCol="0" anchor="ctr"/>
-          <a:lstStyle/>
-          <a:p>
-            <a:pPr algn="ctr"/>
-          </a:p>
-        </p:txBody>
-      </p:sp>
-      <p:sp>
-        <p:nvSpPr>
-          <p:cNvPr id="19" name="Rectangle 18"/>
-          <p:cNvSpPr/>
-          <p:nvPr/>
-        </p:nvSpPr>
-        <p:spPr>
-          <a:xfrm>
-            <a:off x="792000" y="3564000"/>
-            <a:ext cx="57600" cy="460800"/>
-          </a:xfrm>
-          <a:prstGeom prst="rect">
-            <a:avLst/>
-          </a:prstGeom>
-          <a:solidFill>
-            <a:srgbClr val="008080"/>
-          </a:solidFill>
-          <a:ln>
-            <a:noFill/>
-          </a:ln>
-          <a:effectLst/>
-        </p:spPr>
-        <p:txBody>
-          <a:bodyPr rtlCol="0" anchor="ctr"/>
-          <a:lstStyle/>
-          <a:p>
-            <a:pPr algn="ctr"/>
-          </a:p>
-        </p:txBody>
-      </p:sp>
-      <p:sp>
-        <p:nvSpPr>
-          <p:cNvPr id="20" name="TextBox 19"/>
+            <a:pPr algn="ctr">
+              <a:lnSpc>
+                <a:spcPct val="100000"/>
+              </a:lnSpc>
+            </a:pPr>
+            <a:r>
+              <a:rPr sz="1600" b="1">
+                <a:solidFill>
+                  <a:srgbClr val="FFFFFF"/>
+                </a:solidFill>
+                <a:latin typeface="Barlow Condensed"/>
+              </a:rPr>
+              <a:t>9h00</a:t>
+            </a:r>
+          </a:p>
+        </p:txBody>
+      </p:sp>
+      <p:sp>
+        <p:nvSpPr>
+          <p:cNvPr id="18" name="TextBox 17"/>
           <p:cNvSpPr txBox="1"/>
           <p:nvPr/>
         </p:nvSpPr>
         <p:spPr>
           <a:xfrm>
-            <a:off x="1008000" y="3679200"/>
-            <a:ext cx="864000" cy="288000"/>
+            <a:off x="1980000" y="3103200"/>
+            <a:ext cx="3762000" cy="251999"/>
           </a:xfrm>
           <a:prstGeom prst="rect">
             <a:avLst/>
@@ -10755,14 +10695,74 @@
               </a:lnSpc>
             </a:pPr>
             <a:r>
-              <a:rPr sz="1600" b="1">
-                <a:solidFill>
-                  <a:srgbClr val="1A1A2E"/>
-                </a:solidFill>
-                <a:latin typeface="Barlow Condensed"/>
-              </a:rPr>
-              <a:t>9h45</a:t>
-            </a:r>
+              <a:rPr sz="1250" b="1">
+                <a:solidFill>
+                  <a:srgbClr val="006A6A"/>
+                </a:solidFill>
+                <a:latin typeface="Barlow"/>
+              </a:rPr>
+              <a:t>Accueil café &amp; petit-déjeuner</a:t>
+            </a:r>
+          </a:p>
+        </p:txBody>
+      </p:sp>
+      <p:sp>
+        <p:nvSpPr>
+          <p:cNvPr id="19" name="Rectangle 18"/>
+          <p:cNvSpPr/>
+          <p:nvPr/>
+        </p:nvSpPr>
+        <p:spPr>
+          <a:xfrm>
+            <a:off x="792000" y="3470400"/>
+            <a:ext cx="990000" cy="367200"/>
+          </a:xfrm>
+          <a:prstGeom prst="rect">
+            <a:avLst/>
+          </a:prstGeom>
+          <a:solidFill>
+            <a:srgbClr val="1A1A2E"/>
+          </a:solidFill>
+          <a:ln>
+            <a:noFill/>
+          </a:ln>
+          <a:effectLst/>
+        </p:spPr>
+        <p:txBody>
+          <a:bodyPr rtlCol="0" anchor="ctr"/>
+          <a:lstStyle/>
+          <a:p>
+            <a:pPr algn="ctr"/>
+          </a:p>
+        </p:txBody>
+      </p:sp>
+      <p:sp>
+        <p:nvSpPr>
+          <p:cNvPr id="20" name="Rectangle 19"/>
+          <p:cNvSpPr/>
+          <p:nvPr/>
+        </p:nvSpPr>
+        <p:spPr>
+          <a:xfrm>
+            <a:off x="1782000" y="3470400"/>
+            <a:ext cx="4122000" cy="367200"/>
+          </a:xfrm>
+          <a:prstGeom prst="rect">
+            <a:avLst/>
+          </a:prstGeom>
+          <a:solidFill>
+            <a:srgbClr val="F0F0F8"/>
+          </a:solidFill>
+          <a:ln>
+            <a:noFill/>
+          </a:ln>
+          <a:effectLst/>
+        </p:spPr>
+        <p:txBody>
+          <a:bodyPr rtlCol="0" anchor="ctr"/>
+          <a:lstStyle/>
+          <a:p>
+            <a:pPr algn="ctr"/>
           </a:p>
         </p:txBody>
       </p:sp>
@@ -10774,8 +10774,8 @@
         </p:nvSpPr>
         <p:spPr>
           <a:xfrm>
-            <a:off x="1944000" y="3693600"/>
-            <a:ext cx="3816000" cy="324000"/>
+            <a:off x="792000" y="3542400"/>
+            <a:ext cx="990000" cy="251999"/>
           </a:xfrm>
           <a:prstGeom prst="rect">
             <a:avLst/>
@@ -10788,93 +10788,33 @@
           </a:bodyPr>
           <a:lstStyle/>
           <a:p>
-            <a:pPr algn="l">
-              <a:lnSpc>
-                <a:spcPct val="110000"/>
-              </a:lnSpc>
-            </a:pPr>
-            <a:r>
-              <a:rPr sz="1200" b="0">
-                <a:solidFill>
-                  <a:srgbClr val="1A1A2E"/>
-                </a:solidFill>
-                <a:latin typeface="Barlow"/>
-              </a:rPr>
-              <a:t>Mot d'ouverture</a:t>
-            </a:r>
-          </a:p>
-        </p:txBody>
-      </p:sp>
-      <p:sp>
-        <p:nvSpPr>
-          <p:cNvPr id="22" name="Rectangle 21"/>
-          <p:cNvSpPr/>
-          <p:nvPr/>
-        </p:nvSpPr>
-        <p:spPr>
-          <a:xfrm>
-            <a:off x="792000" y="4104000"/>
-            <a:ext cx="5112000" cy="460800"/>
-          </a:xfrm>
-          <a:prstGeom prst="rect">
-            <a:avLst/>
-          </a:prstGeom>
-          <a:solidFill>
-            <a:srgbClr val="FFFFFF"/>
-          </a:solidFill>
-          <a:ln>
-            <a:noFill/>
-          </a:ln>
-          <a:effectLst/>
-        </p:spPr>
-        <p:txBody>
-          <a:bodyPr rtlCol="0" anchor="ctr"/>
-          <a:lstStyle/>
-          <a:p>
-            <a:pPr algn="ctr"/>
-          </a:p>
-        </p:txBody>
-      </p:sp>
-      <p:sp>
-        <p:nvSpPr>
-          <p:cNvPr id="23" name="Rectangle 22"/>
-          <p:cNvSpPr/>
-          <p:nvPr/>
-        </p:nvSpPr>
-        <p:spPr>
-          <a:xfrm>
-            <a:off x="792000" y="4104000"/>
-            <a:ext cx="57600" cy="460800"/>
-          </a:xfrm>
-          <a:prstGeom prst="rect">
-            <a:avLst/>
-          </a:prstGeom>
-          <a:solidFill>
-            <a:srgbClr val="008080"/>
-          </a:solidFill>
-          <a:ln>
-            <a:noFill/>
-          </a:ln>
-          <a:effectLst/>
-        </p:spPr>
-        <p:txBody>
-          <a:bodyPr rtlCol="0" anchor="ctr"/>
-          <a:lstStyle/>
-          <a:p>
-            <a:pPr algn="ctr"/>
-          </a:p>
-        </p:txBody>
-      </p:sp>
-      <p:sp>
-        <p:nvSpPr>
-          <p:cNvPr id="24" name="TextBox 23"/>
+            <a:pPr algn="ctr">
+              <a:lnSpc>
+                <a:spcPct val="100000"/>
+              </a:lnSpc>
+            </a:pPr>
+            <a:r>
+              <a:rPr sz="1600" b="1">
+                <a:solidFill>
+                  <a:srgbClr val="FFFFFF"/>
+                </a:solidFill>
+                <a:latin typeface="Barlow Condensed"/>
+              </a:rPr>
+              <a:t>9h45</a:t>
+            </a:r>
+          </a:p>
+        </p:txBody>
+      </p:sp>
+      <p:sp>
+        <p:nvSpPr>
+          <p:cNvPr id="22" name="TextBox 21"/>
           <p:cNvSpPr txBox="1"/>
           <p:nvPr/>
         </p:nvSpPr>
         <p:spPr>
           <a:xfrm>
-            <a:off x="1008000" y="4219200"/>
-            <a:ext cx="864000" cy="288000"/>
+            <a:off x="1980000" y="3549600"/>
+            <a:ext cx="3762000" cy="251999"/>
           </a:xfrm>
           <a:prstGeom prst="rect">
             <a:avLst/>
@@ -10893,27 +10833,117 @@
               </a:lnSpc>
             </a:pPr>
             <a:r>
-              <a:rPr sz="1600" b="1">
+              <a:rPr sz="1250" b="1">
                 <a:solidFill>
                   <a:srgbClr val="1A1A2E"/>
                 </a:solidFill>
-                <a:latin typeface="Barlow Condensed"/>
-              </a:rPr>
-              <a:t>10h00</a:t>
-            </a:r>
-          </a:p>
-        </p:txBody>
-      </p:sp>
-      <p:sp>
-        <p:nvSpPr>
-          <p:cNvPr id="25" name="TextBox 24"/>
+                <a:latin typeface="Barlow"/>
+              </a:rPr>
+              <a:t>Mot d'ouverture</a:t>
+            </a:r>
+          </a:p>
+        </p:txBody>
+      </p:sp>
+      <p:sp>
+        <p:nvSpPr>
+          <p:cNvPr id="23" name="Rectangle 22"/>
+          <p:cNvSpPr/>
+          <p:nvPr/>
+        </p:nvSpPr>
+        <p:spPr>
+          <a:xfrm>
+            <a:off x="792000" y="3916800"/>
+            <a:ext cx="990000" cy="558000"/>
+          </a:xfrm>
+          <a:prstGeom prst="rect">
+            <a:avLst/>
+          </a:prstGeom>
+          <a:solidFill>
+            <a:srgbClr val="1A1A2E"/>
+          </a:solidFill>
+          <a:ln>
+            <a:noFill/>
+          </a:ln>
+          <a:effectLst/>
+        </p:spPr>
+        <p:txBody>
+          <a:bodyPr rtlCol="0" anchor="ctr"/>
+          <a:lstStyle/>
+          <a:p>
+            <a:pPr algn="ctr"/>
+          </a:p>
+        </p:txBody>
+      </p:sp>
+      <p:sp>
+        <p:nvSpPr>
+          <p:cNvPr id="24" name="Rectangle 23"/>
+          <p:cNvSpPr/>
+          <p:nvPr/>
+        </p:nvSpPr>
+        <p:spPr>
+          <a:xfrm>
+            <a:off x="1782000" y="3916800"/>
+            <a:ext cx="4122000" cy="558000"/>
+          </a:xfrm>
+          <a:prstGeom prst="rect">
+            <a:avLst/>
+          </a:prstGeom>
+          <a:solidFill>
+            <a:srgbClr val="FFFFFF"/>
+          </a:solidFill>
+          <a:ln>
+            <a:noFill/>
+          </a:ln>
+          <a:effectLst/>
+        </p:spPr>
+        <p:txBody>
+          <a:bodyPr rtlCol="0" anchor="ctr"/>
+          <a:lstStyle/>
+          <a:p>
+            <a:pPr algn="ctr"/>
+          </a:p>
+        </p:txBody>
+      </p:sp>
+      <p:sp>
+        <p:nvSpPr>
+          <p:cNvPr id="25" name="Rectangle 24"/>
+          <p:cNvSpPr/>
+          <p:nvPr/>
+        </p:nvSpPr>
+        <p:spPr>
+          <a:xfrm>
+            <a:off x="1782000" y="3916800"/>
+            <a:ext cx="79200" cy="558000"/>
+          </a:xfrm>
+          <a:prstGeom prst="rect">
+            <a:avLst/>
+          </a:prstGeom>
+          <a:solidFill>
+            <a:srgbClr val="00B4B4"/>
+          </a:solidFill>
+          <a:ln>
+            <a:noFill/>
+          </a:ln>
+          <a:effectLst/>
+        </p:spPr>
+        <p:txBody>
+          <a:bodyPr rtlCol="0" anchor="ctr"/>
+          <a:lstStyle/>
+          <a:p>
+            <a:pPr algn="ctr"/>
+          </a:p>
+        </p:txBody>
+      </p:sp>
+      <p:sp>
+        <p:nvSpPr>
+          <p:cNvPr id="26" name="TextBox 25"/>
           <p:cNvSpPr txBox="1"/>
           <p:nvPr/>
         </p:nvSpPr>
         <p:spPr>
           <a:xfrm>
-            <a:off x="1944000" y="4233600"/>
-            <a:ext cx="3816000" cy="324000"/>
+            <a:off x="792000" y="4084200"/>
+            <a:ext cx="990000" cy="251999"/>
           </a:xfrm>
           <a:prstGeom prst="rect">
             <a:avLst/>
@@ -10926,93 +10956,33 @@
           </a:bodyPr>
           <a:lstStyle/>
           <a:p>
-            <a:pPr algn="l">
-              <a:lnSpc>
-                <a:spcPct val="110000"/>
-              </a:lnSpc>
-            </a:pPr>
-            <a:r>
-              <a:rPr sz="1200" b="0">
-                <a:solidFill>
-                  <a:srgbClr val="1A1A2E"/>
-                </a:solidFill>
-                <a:latin typeface="Barlow"/>
-              </a:rPr>
-              <a:t>Des 7 principes du test aux 7 principes de la qualité</a:t>
-            </a:r>
-          </a:p>
-        </p:txBody>
-      </p:sp>
-      <p:sp>
-        <p:nvSpPr>
-          <p:cNvPr id="26" name="Rectangle 25"/>
-          <p:cNvSpPr/>
-          <p:nvPr/>
-        </p:nvSpPr>
-        <p:spPr>
-          <a:xfrm>
-            <a:off x="792000" y="4644000"/>
-            <a:ext cx="5112000" cy="460800"/>
-          </a:xfrm>
-          <a:prstGeom prst="rect">
-            <a:avLst/>
-          </a:prstGeom>
-          <a:solidFill>
-            <a:srgbClr val="FFFFFF"/>
-          </a:solidFill>
-          <a:ln>
-            <a:noFill/>
-          </a:ln>
-          <a:effectLst/>
-        </p:spPr>
-        <p:txBody>
-          <a:bodyPr rtlCol="0" anchor="ctr"/>
-          <a:lstStyle/>
-          <a:p>
-            <a:pPr algn="ctr"/>
-          </a:p>
-        </p:txBody>
-      </p:sp>
-      <p:sp>
-        <p:nvSpPr>
-          <p:cNvPr id="27" name="Rectangle 26"/>
-          <p:cNvSpPr/>
-          <p:nvPr/>
-        </p:nvSpPr>
-        <p:spPr>
-          <a:xfrm>
-            <a:off x="792000" y="4644000"/>
-            <a:ext cx="57600" cy="460800"/>
-          </a:xfrm>
-          <a:prstGeom prst="rect">
-            <a:avLst/>
-          </a:prstGeom>
-          <a:solidFill>
-            <a:srgbClr val="008080"/>
-          </a:solidFill>
-          <a:ln>
-            <a:noFill/>
-          </a:ln>
-          <a:effectLst/>
-        </p:spPr>
-        <p:txBody>
-          <a:bodyPr rtlCol="0" anchor="ctr"/>
-          <a:lstStyle/>
-          <a:p>
-            <a:pPr algn="ctr"/>
-          </a:p>
-        </p:txBody>
-      </p:sp>
-      <p:sp>
-        <p:nvSpPr>
-          <p:cNvPr id="28" name="TextBox 27"/>
+            <a:pPr algn="ctr">
+              <a:lnSpc>
+                <a:spcPct val="100000"/>
+              </a:lnSpc>
+            </a:pPr>
+            <a:r>
+              <a:rPr sz="1600" b="1">
+                <a:solidFill>
+                  <a:srgbClr val="FFFFFF"/>
+                </a:solidFill>
+                <a:latin typeface="Barlow Condensed"/>
+              </a:rPr>
+              <a:t>10h00</a:t>
+            </a:r>
+          </a:p>
+        </p:txBody>
+      </p:sp>
+      <p:sp>
+        <p:nvSpPr>
+          <p:cNvPr id="27" name="TextBox 26"/>
           <p:cNvSpPr txBox="1"/>
           <p:nvPr/>
         </p:nvSpPr>
         <p:spPr>
           <a:xfrm>
-            <a:off x="1008000" y="4759200"/>
-            <a:ext cx="864000" cy="288000"/>
+            <a:off x="1998000" y="4003200"/>
+            <a:ext cx="3744000" cy="540000"/>
           </a:xfrm>
           <a:prstGeom prst="rect">
             <a:avLst/>
@@ -11031,27 +11001,133 @@
               </a:lnSpc>
             </a:pPr>
             <a:r>
-              <a:rPr sz="1600" b="1">
+              <a:rPr sz="1100" b="1">
+                <a:solidFill>
+                  <a:srgbClr val="006A6A"/>
+                </a:solidFill>
+                <a:latin typeface="Barlow Condensed"/>
+              </a:rPr>
+              <a:t>★ CONFÉRENCE 1</a:t>
+            </a:r>
+          </a:p>
+          <a:p>
+            <a:pPr algn="l">
+              <a:lnSpc>
+                <a:spcPct val="128000"/>
+              </a:lnSpc>
+            </a:pPr>
+            <a:r>
+              <a:rPr sz="1200" b="1">
                 <a:solidFill>
                   <a:srgbClr val="1A1A2E"/>
                 </a:solidFill>
-                <a:latin typeface="Barlow Condensed"/>
-              </a:rPr>
-              <a:t>10h45</a:t>
-            </a:r>
-          </a:p>
-        </p:txBody>
-      </p:sp>
-      <p:sp>
-        <p:nvSpPr>
-          <p:cNvPr id="29" name="TextBox 28"/>
+                <a:latin typeface="Barlow"/>
+              </a:rPr>
+              <a:t>Des 7 principes du test aux 7 principes de la qualité</a:t>
+            </a:r>
+          </a:p>
+        </p:txBody>
+      </p:sp>
+      <p:sp>
+        <p:nvSpPr>
+          <p:cNvPr id="28" name="Rectangle 27"/>
+          <p:cNvSpPr/>
+          <p:nvPr/>
+        </p:nvSpPr>
+        <p:spPr>
+          <a:xfrm>
+            <a:off x="792000" y="4554000"/>
+            <a:ext cx="990000" cy="558000"/>
+          </a:xfrm>
+          <a:prstGeom prst="rect">
+            <a:avLst/>
+          </a:prstGeom>
+          <a:solidFill>
+            <a:srgbClr val="1A1A2E"/>
+          </a:solidFill>
+          <a:ln>
+            <a:noFill/>
+          </a:ln>
+          <a:effectLst/>
+        </p:spPr>
+        <p:txBody>
+          <a:bodyPr rtlCol="0" anchor="ctr"/>
+          <a:lstStyle/>
+          <a:p>
+            <a:pPr algn="ctr"/>
+          </a:p>
+        </p:txBody>
+      </p:sp>
+      <p:sp>
+        <p:nvSpPr>
+          <p:cNvPr id="29" name="Rectangle 28"/>
+          <p:cNvSpPr/>
+          <p:nvPr/>
+        </p:nvSpPr>
+        <p:spPr>
+          <a:xfrm>
+            <a:off x="1782000" y="4554000"/>
+            <a:ext cx="4122000" cy="558000"/>
+          </a:xfrm>
+          <a:prstGeom prst="rect">
+            <a:avLst/>
+          </a:prstGeom>
+          <a:solidFill>
+            <a:srgbClr val="FFFFFF"/>
+          </a:solidFill>
+          <a:ln>
+            <a:noFill/>
+          </a:ln>
+          <a:effectLst/>
+        </p:spPr>
+        <p:txBody>
+          <a:bodyPr rtlCol="0" anchor="ctr"/>
+          <a:lstStyle/>
+          <a:p>
+            <a:pPr algn="ctr"/>
+          </a:p>
+        </p:txBody>
+      </p:sp>
+      <p:sp>
+        <p:nvSpPr>
+          <p:cNvPr id="30" name="Rectangle 29"/>
+          <p:cNvSpPr/>
+          <p:nvPr/>
+        </p:nvSpPr>
+        <p:spPr>
+          <a:xfrm>
+            <a:off x="1782000" y="4554000"/>
+            <a:ext cx="79200" cy="558000"/>
+          </a:xfrm>
+          <a:prstGeom prst="rect">
+            <a:avLst/>
+          </a:prstGeom>
+          <a:solidFill>
+            <a:srgbClr val="ED1B2F"/>
+          </a:solidFill>
+          <a:ln>
+            <a:noFill/>
+          </a:ln>
+          <a:effectLst/>
+        </p:spPr>
+        <p:txBody>
+          <a:bodyPr rtlCol="0" anchor="ctr"/>
+          <a:lstStyle/>
+          <a:p>
+            <a:pPr algn="ctr"/>
+          </a:p>
+        </p:txBody>
+      </p:sp>
+      <p:sp>
+        <p:nvSpPr>
+          <p:cNvPr id="31" name="TextBox 30"/>
           <p:cNvSpPr txBox="1"/>
           <p:nvPr/>
         </p:nvSpPr>
         <p:spPr>
           <a:xfrm>
-            <a:off x="1944000" y="4773600"/>
-            <a:ext cx="3816000" cy="324000"/>
+            <a:off x="792000" y="4721400"/>
+            <a:ext cx="990000" cy="251999"/>
           </a:xfrm>
           <a:prstGeom prst="rect">
             <a:avLst/>
@@ -11064,80 +11140,20 @@
           </a:bodyPr>
           <a:lstStyle/>
           <a:p>
-            <a:pPr algn="l">
-              <a:lnSpc>
-                <a:spcPct val="110000"/>
-              </a:lnSpc>
-            </a:pPr>
-            <a:r>
-              <a:rPr sz="1200" b="0">
-                <a:solidFill>
-                  <a:srgbClr val="1A1A2E"/>
-                </a:solidFill>
-                <a:latin typeface="Barlow"/>
-              </a:rPr>
-              <a:t>De l'IA générative aux tests « augmentés »</a:t>
-            </a:r>
-          </a:p>
-        </p:txBody>
-      </p:sp>
-      <p:sp>
-        <p:nvSpPr>
-          <p:cNvPr id="30" name="Rectangle 29"/>
-          <p:cNvSpPr/>
-          <p:nvPr/>
-        </p:nvSpPr>
-        <p:spPr>
-          <a:xfrm>
-            <a:off x="792000" y="5184000"/>
-            <a:ext cx="5112000" cy="460800"/>
-          </a:xfrm>
-          <a:prstGeom prst="rect">
-            <a:avLst/>
-          </a:prstGeom>
-          <a:solidFill>
-            <a:srgbClr val="FFFFFF"/>
-          </a:solidFill>
-          <a:ln>
-            <a:noFill/>
-          </a:ln>
-          <a:effectLst/>
-        </p:spPr>
-        <p:txBody>
-          <a:bodyPr rtlCol="0" anchor="ctr"/>
-          <a:lstStyle/>
-          <a:p>
-            <a:pPr algn="ctr"/>
-          </a:p>
-        </p:txBody>
-      </p:sp>
-      <p:sp>
-        <p:nvSpPr>
-          <p:cNvPr id="31" name="Rectangle 30"/>
-          <p:cNvSpPr/>
-          <p:nvPr/>
-        </p:nvSpPr>
-        <p:spPr>
-          <a:xfrm>
-            <a:off x="792000" y="5184000"/>
-            <a:ext cx="57600" cy="460800"/>
-          </a:xfrm>
-          <a:prstGeom prst="rect">
-            <a:avLst/>
-          </a:prstGeom>
-          <a:solidFill>
-            <a:srgbClr val="008080"/>
-          </a:solidFill>
-          <a:ln>
-            <a:noFill/>
-          </a:ln>
-          <a:effectLst/>
-        </p:spPr>
-        <p:txBody>
-          <a:bodyPr rtlCol="0" anchor="ctr"/>
-          <a:lstStyle/>
-          <a:p>
-            <a:pPr algn="ctr"/>
+            <a:pPr algn="ctr">
+              <a:lnSpc>
+                <a:spcPct val="100000"/>
+              </a:lnSpc>
+            </a:pPr>
+            <a:r>
+              <a:rPr sz="1600" b="1">
+                <a:solidFill>
+                  <a:srgbClr val="FFFFFF"/>
+                </a:solidFill>
+                <a:latin typeface="Barlow Condensed"/>
+              </a:rPr>
+              <a:t>10h45</a:t>
+            </a:r>
           </a:p>
         </p:txBody>
       </p:sp>
@@ -11149,8 +11165,8 @@
         </p:nvSpPr>
         <p:spPr>
           <a:xfrm>
-            <a:off x="1008000" y="5299200"/>
-            <a:ext cx="864000" cy="288000"/>
+            <a:off x="1998000" y="4640400"/>
+            <a:ext cx="3744000" cy="540000"/>
           </a:xfrm>
           <a:prstGeom prst="rect">
             <a:avLst/>
@@ -11169,27 +11185,133 @@
               </a:lnSpc>
             </a:pPr>
             <a:r>
-              <a:rPr sz="1600" b="1">
+              <a:rPr sz="1100" b="1">
+                <a:solidFill>
+                  <a:srgbClr val="C01020"/>
+                </a:solidFill>
+                <a:latin typeface="Barlow Condensed"/>
+              </a:rPr>
+              <a:t>★ CONFÉRENCE 2</a:t>
+            </a:r>
+          </a:p>
+          <a:p>
+            <a:pPr algn="l">
+              <a:lnSpc>
+                <a:spcPct val="128000"/>
+              </a:lnSpc>
+            </a:pPr>
+            <a:r>
+              <a:rPr sz="1200" b="1">
                 <a:solidFill>
                   <a:srgbClr val="1A1A2E"/>
                 </a:solidFill>
-                <a:latin typeface="Barlow Condensed"/>
-              </a:rPr>
-              <a:t>11h30</a:t>
-            </a:r>
-          </a:p>
-        </p:txBody>
-      </p:sp>
-      <p:sp>
-        <p:nvSpPr>
-          <p:cNvPr id="33" name="TextBox 32"/>
+                <a:latin typeface="Barlow"/>
+              </a:rPr>
+              <a:t>De l'IA générative aux tests « augmentés »</a:t>
+            </a:r>
+          </a:p>
+        </p:txBody>
+      </p:sp>
+      <p:sp>
+        <p:nvSpPr>
+          <p:cNvPr id="33" name="Rectangle 32"/>
+          <p:cNvSpPr/>
+          <p:nvPr/>
+        </p:nvSpPr>
+        <p:spPr>
+          <a:xfrm>
+            <a:off x="792000" y="5191200"/>
+            <a:ext cx="990000" cy="558000"/>
+          </a:xfrm>
+          <a:prstGeom prst="rect">
+            <a:avLst/>
+          </a:prstGeom>
+          <a:solidFill>
+            <a:srgbClr val="1A1A2E"/>
+          </a:solidFill>
+          <a:ln>
+            <a:noFill/>
+          </a:ln>
+          <a:effectLst/>
+        </p:spPr>
+        <p:txBody>
+          <a:bodyPr rtlCol="0" anchor="ctr"/>
+          <a:lstStyle/>
+          <a:p>
+            <a:pPr algn="ctr"/>
+          </a:p>
+        </p:txBody>
+      </p:sp>
+      <p:sp>
+        <p:nvSpPr>
+          <p:cNvPr id="34" name="Rectangle 33"/>
+          <p:cNvSpPr/>
+          <p:nvPr/>
+        </p:nvSpPr>
+        <p:spPr>
+          <a:xfrm>
+            <a:off x="1782000" y="5191200"/>
+            <a:ext cx="4122000" cy="558000"/>
+          </a:xfrm>
+          <a:prstGeom prst="rect">
+            <a:avLst/>
+          </a:prstGeom>
+          <a:solidFill>
+            <a:srgbClr val="FFFFFF"/>
+          </a:solidFill>
+          <a:ln>
+            <a:noFill/>
+          </a:ln>
+          <a:effectLst/>
+        </p:spPr>
+        <p:txBody>
+          <a:bodyPr rtlCol="0" anchor="ctr"/>
+          <a:lstStyle/>
+          <a:p>
+            <a:pPr algn="ctr"/>
+          </a:p>
+        </p:txBody>
+      </p:sp>
+      <p:sp>
+        <p:nvSpPr>
+          <p:cNvPr id="35" name="Rectangle 34"/>
+          <p:cNvSpPr/>
+          <p:nvPr/>
+        </p:nvSpPr>
+        <p:spPr>
+          <a:xfrm>
+            <a:off x="1782000" y="5191200"/>
+            <a:ext cx="79200" cy="558000"/>
+          </a:xfrm>
+          <a:prstGeom prst="rect">
+            <a:avLst/>
+          </a:prstGeom>
+          <a:solidFill>
+            <a:srgbClr val="9EBE38"/>
+          </a:solidFill>
+          <a:ln>
+            <a:noFill/>
+          </a:ln>
+          <a:effectLst/>
+        </p:spPr>
+        <p:txBody>
+          <a:bodyPr rtlCol="0" anchor="ctr"/>
+          <a:lstStyle/>
+          <a:p>
+            <a:pPr algn="ctr"/>
+          </a:p>
+        </p:txBody>
+      </p:sp>
+      <p:sp>
+        <p:nvSpPr>
+          <p:cNvPr id="36" name="TextBox 35"/>
           <p:cNvSpPr txBox="1"/>
           <p:nvPr/>
         </p:nvSpPr>
         <p:spPr>
           <a:xfrm>
-            <a:off x="1944000" y="5313600"/>
-            <a:ext cx="3816000" cy="324000"/>
+            <a:off x="792000" y="5358600"/>
+            <a:ext cx="990000" cy="251999"/>
           </a:xfrm>
           <a:prstGeom prst="rect">
             <a:avLst/>
@@ -11202,93 +11324,33 @@
           </a:bodyPr>
           <a:lstStyle/>
           <a:p>
-            <a:pPr algn="l">
-              <a:lnSpc>
-                <a:spcPct val="110000"/>
-              </a:lnSpc>
-            </a:pPr>
-            <a:r>
-              <a:rPr sz="1200" b="0">
-                <a:solidFill>
-                  <a:srgbClr val="1A1A2E"/>
-                </a:solidFill>
-                <a:latin typeface="Barlow"/>
-              </a:rPr>
-              <a:t>Mode produit et les tests</a:t>
-            </a:r>
-          </a:p>
-        </p:txBody>
-      </p:sp>
-      <p:sp>
-        <p:nvSpPr>
-          <p:cNvPr id="34" name="Rectangle 33"/>
-          <p:cNvSpPr/>
-          <p:nvPr/>
-        </p:nvSpPr>
-        <p:spPr>
-          <a:xfrm>
-            <a:off x="792000" y="5724000"/>
-            <a:ext cx="5112000" cy="460800"/>
-          </a:xfrm>
-          <a:prstGeom prst="rect">
-            <a:avLst/>
-          </a:prstGeom>
-          <a:solidFill>
-            <a:srgbClr val="FFFFFF"/>
-          </a:solidFill>
-          <a:ln>
-            <a:noFill/>
-          </a:ln>
-          <a:effectLst/>
-        </p:spPr>
-        <p:txBody>
-          <a:bodyPr rtlCol="0" anchor="ctr"/>
-          <a:lstStyle/>
-          <a:p>
-            <a:pPr algn="ctr"/>
-          </a:p>
-        </p:txBody>
-      </p:sp>
-      <p:sp>
-        <p:nvSpPr>
-          <p:cNvPr id="35" name="Rectangle 34"/>
-          <p:cNvSpPr/>
-          <p:nvPr/>
-        </p:nvSpPr>
-        <p:spPr>
-          <a:xfrm>
-            <a:off x="792000" y="5724000"/>
-            <a:ext cx="57600" cy="460800"/>
-          </a:xfrm>
-          <a:prstGeom prst="rect">
-            <a:avLst/>
-          </a:prstGeom>
-          <a:solidFill>
-            <a:srgbClr val="008080"/>
-          </a:solidFill>
-          <a:ln>
-            <a:noFill/>
-          </a:ln>
-          <a:effectLst/>
-        </p:spPr>
-        <p:txBody>
-          <a:bodyPr rtlCol="0" anchor="ctr"/>
-          <a:lstStyle/>
-          <a:p>
-            <a:pPr algn="ctr"/>
-          </a:p>
-        </p:txBody>
-      </p:sp>
-      <p:sp>
-        <p:nvSpPr>
-          <p:cNvPr id="36" name="TextBox 35"/>
+            <a:pPr algn="ctr">
+              <a:lnSpc>
+                <a:spcPct val="100000"/>
+              </a:lnSpc>
+            </a:pPr>
+            <a:r>
+              <a:rPr sz="1600" b="1">
+                <a:solidFill>
+                  <a:srgbClr val="FFFFFF"/>
+                </a:solidFill>
+                <a:latin typeface="Barlow Condensed"/>
+              </a:rPr>
+              <a:t>11h30</a:t>
+            </a:r>
+          </a:p>
+        </p:txBody>
+      </p:sp>
+      <p:sp>
+        <p:nvSpPr>
+          <p:cNvPr id="37" name="TextBox 36"/>
           <p:cNvSpPr txBox="1"/>
           <p:nvPr/>
         </p:nvSpPr>
         <p:spPr>
           <a:xfrm>
-            <a:off x="1008000" y="5839200"/>
-            <a:ext cx="864000" cy="288000"/>
+            <a:off x="1998000" y="5277600"/>
+            <a:ext cx="3744000" cy="540000"/>
           </a:xfrm>
           <a:prstGeom prst="rect">
             <a:avLst/>
@@ -11307,27 +11369,103 @@
               </a:lnSpc>
             </a:pPr>
             <a:r>
-              <a:rPr sz="1600" b="1">
+              <a:rPr sz="1100" b="1">
+                <a:solidFill>
+                  <a:srgbClr val="006A4E"/>
+                </a:solidFill>
+                <a:latin typeface="Barlow Condensed"/>
+              </a:rPr>
+              <a:t>★ TABLE RONDE</a:t>
+            </a:r>
+          </a:p>
+          <a:p>
+            <a:pPr algn="l">
+              <a:lnSpc>
+                <a:spcPct val="128000"/>
+              </a:lnSpc>
+            </a:pPr>
+            <a:r>
+              <a:rPr sz="1200" b="1">
                 <a:solidFill>
                   <a:srgbClr val="1A1A2E"/>
                 </a:solidFill>
-                <a:latin typeface="Barlow Condensed"/>
-              </a:rPr>
-              <a:t>12h15</a:t>
-            </a:r>
-          </a:p>
-        </p:txBody>
-      </p:sp>
-      <p:sp>
-        <p:nvSpPr>
-          <p:cNvPr id="37" name="TextBox 36"/>
+                <a:latin typeface="Barlow"/>
+              </a:rPr>
+              <a:t>Mode produit et les tests</a:t>
+            </a:r>
+          </a:p>
+        </p:txBody>
+      </p:sp>
+      <p:sp>
+        <p:nvSpPr>
+          <p:cNvPr id="38" name="Rectangle 37"/>
+          <p:cNvSpPr/>
+          <p:nvPr/>
+        </p:nvSpPr>
+        <p:spPr>
+          <a:xfrm>
+            <a:off x="792000" y="5828400"/>
+            <a:ext cx="990000" cy="367200"/>
+          </a:xfrm>
+          <a:prstGeom prst="rect">
+            <a:avLst/>
+          </a:prstGeom>
+          <a:solidFill>
+            <a:srgbClr val="C01020"/>
+          </a:solidFill>
+          <a:ln>
+            <a:noFill/>
+          </a:ln>
+          <a:effectLst/>
+        </p:spPr>
+        <p:txBody>
+          <a:bodyPr rtlCol="0" anchor="ctr"/>
+          <a:lstStyle/>
+          <a:p>
+            <a:pPr algn="ctr"/>
+          </a:p>
+        </p:txBody>
+      </p:sp>
+      <p:sp>
+        <p:nvSpPr>
+          <p:cNvPr id="39" name="Rectangle 38"/>
+          <p:cNvSpPr/>
+          <p:nvPr/>
+        </p:nvSpPr>
+        <p:spPr>
+          <a:xfrm>
+            <a:off x="1782000" y="5828400"/>
+            <a:ext cx="4122000" cy="367200"/>
+          </a:xfrm>
+          <a:prstGeom prst="rect">
+            <a:avLst/>
+          </a:prstGeom>
+          <a:solidFill>
+            <a:srgbClr val="FFF3E0"/>
+          </a:solidFill>
+          <a:ln>
+            <a:noFill/>
+          </a:ln>
+          <a:effectLst/>
+        </p:spPr>
+        <p:txBody>
+          <a:bodyPr rtlCol="0" anchor="ctr"/>
+          <a:lstStyle/>
+          <a:p>
+            <a:pPr algn="ctr"/>
+          </a:p>
+        </p:txBody>
+      </p:sp>
+      <p:sp>
+        <p:nvSpPr>
+          <p:cNvPr id="40" name="TextBox 39"/>
           <p:cNvSpPr txBox="1"/>
           <p:nvPr/>
         </p:nvSpPr>
         <p:spPr>
           <a:xfrm>
-            <a:off x="1944000" y="5853600"/>
-            <a:ext cx="3816000" cy="324000"/>
+            <a:off x="792000" y="5900400"/>
+            <a:ext cx="990000" cy="251999"/>
           </a:xfrm>
           <a:prstGeom prst="rect">
             <a:avLst/>
@@ -11340,33 +11478,33 @@
           </a:bodyPr>
           <a:lstStyle/>
           <a:p>
-            <a:pPr algn="l">
-              <a:lnSpc>
-                <a:spcPct val="110000"/>
-              </a:lnSpc>
-            </a:pPr>
-            <a:r>
-              <a:rPr sz="1200" b="0">
-                <a:solidFill>
-                  <a:srgbClr val="1A1A2E"/>
-                </a:solidFill>
-                <a:latin typeface="Barlow"/>
-              </a:rPr>
-              <a:t>Cocktail déjeunatoire</a:t>
-            </a:r>
-          </a:p>
-        </p:txBody>
-      </p:sp>
-      <p:sp>
-        <p:nvSpPr>
-          <p:cNvPr id="38" name="TextBox 37"/>
+            <a:pPr algn="ctr">
+              <a:lnSpc>
+                <a:spcPct val="100000"/>
+              </a:lnSpc>
+            </a:pPr>
+            <a:r>
+              <a:rPr sz="1600" b="1">
+                <a:solidFill>
+                  <a:srgbClr val="FFFFFF"/>
+                </a:solidFill>
+                <a:latin typeface="Barlow Condensed"/>
+              </a:rPr>
+              <a:t>12h15</a:t>
+            </a:r>
+          </a:p>
+        </p:txBody>
+      </p:sp>
+      <p:sp>
+        <p:nvSpPr>
+          <p:cNvPr id="41" name="TextBox 40"/>
           <p:cNvSpPr txBox="1"/>
           <p:nvPr/>
         </p:nvSpPr>
         <p:spPr>
           <a:xfrm>
-            <a:off x="6228000" y="2592000"/>
-            <a:ext cx="5112000" cy="324000"/>
+            <a:off x="1980000" y="5907600"/>
+            <a:ext cx="3762000" cy="251999"/>
           </a:xfrm>
           <a:prstGeom prst="rect">
             <a:avLst/>
@@ -11385,87 +11523,87 @@
               </a:lnSpc>
             </a:pPr>
             <a:r>
-              <a:rPr sz="1700" b="1">
-                <a:solidFill>
-                  <a:srgbClr val="C01020"/>
-                </a:solidFill>
-                <a:latin typeface="Barlow Condensed"/>
-              </a:rPr>
-              <a:t>APRÈS-MIDI — KIOSQUES &amp; ATELIERS</a:t>
-            </a:r>
-          </a:p>
-        </p:txBody>
-      </p:sp>
-      <p:sp>
-        <p:nvSpPr>
-          <p:cNvPr id="39" name="Rectangle 38"/>
+              <a:rPr sz="1250" b="1">
+                <a:solidFill>
+                  <a:srgbClr val="8B4500"/>
+                </a:solidFill>
+                <a:latin typeface="Barlow"/>
+              </a:rPr>
+              <a:t>Cocktail déjeunatoire</a:t>
+            </a:r>
+          </a:p>
+        </p:txBody>
+      </p:sp>
+      <p:sp>
+        <p:nvSpPr>
+          <p:cNvPr id="42" name="Rectangle 41"/>
           <p:cNvSpPr/>
           <p:nvPr/>
         </p:nvSpPr>
         <p:spPr>
           <a:xfrm>
             <a:off x="6228000" y="3024000"/>
-            <a:ext cx="5112000" cy="460800"/>
-          </a:xfrm>
-          <a:prstGeom prst="rect">
-            <a:avLst/>
-          </a:prstGeom>
-          <a:solidFill>
-            <a:srgbClr val="FFFFFF"/>
-          </a:solidFill>
-          <a:ln>
-            <a:noFill/>
-          </a:ln>
-          <a:effectLst/>
-        </p:spPr>
-        <p:txBody>
-          <a:bodyPr rtlCol="0" anchor="ctr"/>
-          <a:lstStyle/>
-          <a:p>
-            <a:pPr algn="ctr"/>
-          </a:p>
-        </p:txBody>
-      </p:sp>
-      <p:sp>
-        <p:nvSpPr>
-          <p:cNvPr id="40" name="Rectangle 39"/>
-          <p:cNvSpPr/>
-          <p:nvPr/>
-        </p:nvSpPr>
-        <p:spPr>
-          <a:xfrm>
-            <a:off x="6228000" y="3024000"/>
-            <a:ext cx="57600" cy="460800"/>
-          </a:xfrm>
-          <a:prstGeom prst="rect">
-            <a:avLst/>
-          </a:prstGeom>
-          <a:solidFill>
-            <a:srgbClr val="ED1B2F"/>
-          </a:solidFill>
-          <a:ln>
-            <a:noFill/>
-          </a:ln>
-          <a:effectLst/>
-        </p:spPr>
-        <p:txBody>
-          <a:bodyPr rtlCol="0" anchor="ctr"/>
-          <a:lstStyle/>
-          <a:p>
-            <a:pPr algn="ctr"/>
-          </a:p>
-        </p:txBody>
-      </p:sp>
-      <p:sp>
-        <p:nvSpPr>
-          <p:cNvPr id="41" name="TextBox 40"/>
+            <a:ext cx="990000" cy="439200"/>
+          </a:xfrm>
+          <a:prstGeom prst="rect">
+            <a:avLst/>
+          </a:prstGeom>
+          <a:solidFill>
+            <a:srgbClr val="1A1A2E"/>
+          </a:solidFill>
+          <a:ln>
+            <a:noFill/>
+          </a:ln>
+          <a:effectLst/>
+        </p:spPr>
+        <p:txBody>
+          <a:bodyPr rtlCol="0" anchor="ctr"/>
+          <a:lstStyle/>
+          <a:p>
+            <a:pPr algn="ctr"/>
+          </a:p>
+        </p:txBody>
+      </p:sp>
+      <p:sp>
+        <p:nvSpPr>
+          <p:cNvPr id="43" name="Rectangle 42"/>
+          <p:cNvSpPr/>
+          <p:nvPr/>
+        </p:nvSpPr>
+        <p:spPr>
+          <a:xfrm>
+            <a:off x="7218000" y="3024000"/>
+            <a:ext cx="4122000" cy="439200"/>
+          </a:xfrm>
+          <a:prstGeom prst="rect">
+            <a:avLst/>
+          </a:prstGeom>
+          <a:solidFill>
+            <a:srgbClr val="F0F0F8"/>
+          </a:solidFill>
+          <a:ln>
+            <a:noFill/>
+          </a:ln>
+          <a:effectLst/>
+        </p:spPr>
+        <p:txBody>
+          <a:bodyPr rtlCol="0" anchor="ctr"/>
+          <a:lstStyle/>
+          <a:p>
+            <a:pPr algn="ctr"/>
+          </a:p>
+        </p:txBody>
+      </p:sp>
+      <p:sp>
+        <p:nvSpPr>
+          <p:cNvPr id="44" name="TextBox 43"/>
           <p:cNvSpPr txBox="1"/>
           <p:nvPr/>
         </p:nvSpPr>
         <p:spPr>
           <a:xfrm>
-            <a:off x="6444000" y="3139200"/>
-            <a:ext cx="864000" cy="288000"/>
+            <a:off x="6228000" y="3132000"/>
+            <a:ext cx="990000" cy="251999"/>
           </a:xfrm>
           <a:prstGeom prst="rect">
             <a:avLst/>
@@ -11478,7 +11616,7 @@
           </a:bodyPr>
           <a:lstStyle/>
           <a:p>
-            <a:pPr algn="l">
+            <a:pPr algn="ctr">
               <a:lnSpc>
                 <a:spcPct val="100000"/>
               </a:lnSpc>
@@ -11486,7 +11624,7 @@
             <a:r>
               <a:rPr sz="1600" b="1">
                 <a:solidFill>
-                  <a:srgbClr val="1A1A2E"/>
+                  <a:srgbClr val="FFFFFF"/>
                 </a:solidFill>
                 <a:latin typeface="Barlow Condensed"/>
               </a:rPr>
@@ -11497,14 +11635,14 @@
       </p:sp>
       <p:sp>
         <p:nvSpPr>
-          <p:cNvPr id="42" name="TextBox 41"/>
+          <p:cNvPr id="45" name="TextBox 44"/>
           <p:cNvSpPr txBox="1"/>
           <p:nvPr/>
         </p:nvSpPr>
         <p:spPr>
           <a:xfrm>
-            <a:off x="7380000" y="3153600"/>
-            <a:ext cx="3816000" cy="324000"/>
+            <a:off x="7416000" y="3139200"/>
+            <a:ext cx="3762000" cy="251999"/>
           </a:xfrm>
           <a:prstGeom prst="rect">
             <a:avLst/>
@@ -11519,11 +11657,11 @@
           <a:p>
             <a:pPr algn="l">
               <a:lnSpc>
-                <a:spcPct val="110000"/>
-              </a:lnSpc>
-            </a:pPr>
-            <a:r>
-              <a:rPr sz="1200" b="0">
+                <a:spcPct val="100000"/>
+              </a:lnSpc>
+            </a:pPr>
+            <a:r>
+              <a:rPr sz="1250" b="1">
                 <a:solidFill>
                   <a:srgbClr val="1A1A2E"/>
                 </a:solidFill>
@@ -11536,74 +11674,44 @@
       </p:sp>
       <p:sp>
         <p:nvSpPr>
-          <p:cNvPr id="43" name="Rectangle 42"/>
-          <p:cNvSpPr/>
-          <p:nvPr/>
-        </p:nvSpPr>
-        <p:spPr>
-          <a:xfrm>
-            <a:off x="6228000" y="3564000"/>
-            <a:ext cx="5112000" cy="460800"/>
-          </a:xfrm>
-          <a:prstGeom prst="rect">
-            <a:avLst/>
-          </a:prstGeom>
-          <a:solidFill>
-            <a:srgbClr val="FFFFFF"/>
-          </a:solidFill>
-          <a:ln>
-            <a:noFill/>
-          </a:ln>
-          <a:effectLst/>
-        </p:spPr>
-        <p:txBody>
-          <a:bodyPr rtlCol="0" anchor="ctr"/>
-          <a:lstStyle/>
-          <a:p>
-            <a:pPr algn="ctr"/>
-          </a:p>
-        </p:txBody>
-      </p:sp>
-      <p:sp>
-        <p:nvSpPr>
-          <p:cNvPr id="44" name="Rectangle 43"/>
-          <p:cNvSpPr/>
-          <p:nvPr/>
-        </p:nvSpPr>
-        <p:spPr>
-          <a:xfrm>
-            <a:off x="6228000" y="3564000"/>
-            <a:ext cx="57600" cy="460800"/>
-          </a:xfrm>
-          <a:prstGeom prst="rect">
-            <a:avLst/>
-          </a:prstGeom>
-          <a:solidFill>
-            <a:srgbClr val="ED1B2F"/>
-          </a:solidFill>
-          <a:ln>
-            <a:noFill/>
-          </a:ln>
-          <a:effectLst/>
-        </p:spPr>
-        <p:txBody>
-          <a:bodyPr rtlCol="0" anchor="ctr"/>
-          <a:lstStyle/>
-          <a:p>
-            <a:pPr algn="ctr"/>
-          </a:p>
-        </p:txBody>
-      </p:sp>
-      <p:sp>
-        <p:nvSpPr>
-          <p:cNvPr id="45" name="TextBox 44"/>
+          <p:cNvPr id="46" name="Rectangle 45"/>
+          <p:cNvSpPr/>
+          <p:nvPr/>
+        </p:nvSpPr>
+        <p:spPr>
+          <a:xfrm>
+            <a:off x="6228000" y="3722400"/>
+            <a:ext cx="5112000" cy="835200"/>
+          </a:xfrm>
+          <a:prstGeom prst="rect">
+            <a:avLst/>
+          </a:prstGeom>
+          <a:solidFill>
+            <a:srgbClr val="1A1A2E"/>
+          </a:solidFill>
+          <a:ln>
+            <a:noFill/>
+          </a:ln>
+          <a:effectLst/>
+        </p:spPr>
+        <p:txBody>
+          <a:bodyPr rtlCol="0" anchor="ctr"/>
+          <a:lstStyle/>
+          <a:p>
+            <a:pPr algn="ctr"/>
+          </a:p>
+        </p:txBody>
+      </p:sp>
+      <p:sp>
+        <p:nvSpPr>
+          <p:cNvPr id="47" name="TextBox 46"/>
           <p:cNvSpPr txBox="1"/>
           <p:nvPr/>
         </p:nvSpPr>
         <p:spPr>
           <a:xfrm>
-            <a:off x="6444000" y="3679200"/>
-            <a:ext cx="864000" cy="288000"/>
+            <a:off x="6479999" y="3909600"/>
+            <a:ext cx="4608001" cy="540000"/>
           </a:xfrm>
           <a:prstGeom prst="rect">
             <a:avLst/>
@@ -11622,27 +11730,103 @@
               </a:lnSpc>
             </a:pPr>
             <a:r>
-              <a:rPr sz="1600" b="1">
-                <a:solidFill>
-                  <a:srgbClr val="1A1A2E"/>
+              <a:rPr sz="1500" b="1">
+                <a:solidFill>
+                  <a:srgbClr val="00B4B4"/>
                 </a:solidFill>
                 <a:latin typeface="Barlow Condensed"/>
               </a:rPr>
-              <a:t>14h00</a:t>
-            </a:r>
-          </a:p>
-        </p:txBody>
-      </p:sp>
-      <p:sp>
-        <p:nvSpPr>
-          <p:cNvPr id="46" name="TextBox 45"/>
+              <a:t>10 KIOSQUES EN SIMULTANÉ · 5 ROTATIONS IDENTIQUES</a:t>
+            </a:r>
+          </a:p>
+          <a:p>
+            <a:pPr algn="l">
+              <a:lnSpc>
+                <a:spcPct val="145000"/>
+              </a:lnSpc>
+            </a:pPr>
+            <a:r>
+              <a:rPr sz="1050" b="0">
+                <a:solidFill>
+                  <a:srgbClr val="D9EFEF"/>
+                </a:solidFill>
+                <a:latin typeface="Barlow"/>
+              </a:rPr>
+              <a:t>20 min d'atelier · 5 min de questions — choisissez vos sessions !</a:t>
+            </a:r>
+          </a:p>
+        </p:txBody>
+      </p:sp>
+      <p:sp>
+        <p:nvSpPr>
+          <p:cNvPr id="48" name="Rectangle 47"/>
+          <p:cNvSpPr/>
+          <p:nvPr/>
+        </p:nvSpPr>
+        <p:spPr>
+          <a:xfrm>
+            <a:off x="6228000" y="4816800"/>
+            <a:ext cx="918720" cy="666000"/>
+          </a:xfrm>
+          <a:prstGeom prst="rect">
+            <a:avLst/>
+          </a:prstGeom>
+          <a:solidFill>
+            <a:srgbClr val="D9EFEF"/>
+          </a:solidFill>
+          <a:ln>
+            <a:noFill/>
+          </a:ln>
+          <a:effectLst/>
+        </p:spPr>
+        <p:txBody>
+          <a:bodyPr rtlCol="0" anchor="ctr"/>
+          <a:lstStyle/>
+          <a:p>
+            <a:pPr algn="ctr"/>
+          </a:p>
+        </p:txBody>
+      </p:sp>
+      <p:sp>
+        <p:nvSpPr>
+          <p:cNvPr id="49" name="Rectangle 48"/>
+          <p:cNvSpPr/>
+          <p:nvPr/>
+        </p:nvSpPr>
+        <p:spPr>
+          <a:xfrm>
+            <a:off x="6228000" y="4816800"/>
+            <a:ext cx="50400" cy="666000"/>
+          </a:xfrm>
+          <a:prstGeom prst="rect">
+            <a:avLst/>
+          </a:prstGeom>
+          <a:solidFill>
+            <a:srgbClr val="008080"/>
+          </a:solidFill>
+          <a:ln>
+            <a:noFill/>
+          </a:ln>
+          <a:effectLst/>
+        </p:spPr>
+        <p:txBody>
+          <a:bodyPr rtlCol="0" anchor="ctr"/>
+          <a:lstStyle/>
+          <a:p>
+            <a:pPr algn="ctr"/>
+          </a:p>
+        </p:txBody>
+      </p:sp>
+      <p:sp>
+        <p:nvSpPr>
+          <p:cNvPr id="50" name="TextBox 49"/>
           <p:cNvSpPr txBox="1"/>
           <p:nvPr/>
         </p:nvSpPr>
         <p:spPr>
           <a:xfrm>
-            <a:off x="7380000" y="3693600"/>
-            <a:ext cx="3816000" cy="324000"/>
+            <a:off x="6228000" y="4953600"/>
+            <a:ext cx="918720" cy="432000"/>
           </a:xfrm>
           <a:prstGeom prst="rect">
             <a:avLst/>
@@ -11655,93 +11839,109 @@
           </a:bodyPr>
           <a:lstStyle/>
           <a:p>
-            <a:pPr algn="l">
-              <a:lnSpc>
-                <a:spcPct val="110000"/>
-              </a:lnSpc>
-            </a:pPr>
-            <a:r>
-              <a:rPr sz="1200" b="0">
-                <a:solidFill>
-                  <a:srgbClr val="1A1A2E"/>
+            <a:pPr algn="ctr">
+              <a:lnSpc>
+                <a:spcPct val="100000"/>
+              </a:lnSpc>
+            </a:pPr>
+            <a:r>
+              <a:rPr sz="1500" b="1">
+                <a:solidFill>
+                  <a:srgbClr val="006A6A"/>
+                </a:solidFill>
+                <a:latin typeface="Barlow Condensed"/>
+              </a:rPr>
+              <a:t>14h00</a:t>
+            </a:r>
+          </a:p>
+          <a:p>
+            <a:pPr algn="ctr">
+              <a:lnSpc>
+                <a:spcPct val="150000"/>
+              </a:lnSpc>
+            </a:pPr>
+            <a:r>
+              <a:rPr sz="800" b="0">
+                <a:solidFill>
+                  <a:srgbClr val="4A4A49"/>
                 </a:solidFill>
                 <a:latin typeface="Barlow"/>
               </a:rPr>
-              <a:t>5 rotations de 30 min · 10 kiosques en simultané</a:t>
-            </a:r>
-          </a:p>
-        </p:txBody>
-      </p:sp>
-      <p:sp>
-        <p:nvSpPr>
-          <p:cNvPr id="47" name="Rectangle 46"/>
-          <p:cNvSpPr/>
-          <p:nvPr/>
-        </p:nvSpPr>
-        <p:spPr>
-          <a:xfrm>
-            <a:off x="6228000" y="4104000"/>
-            <a:ext cx="5112000" cy="460800"/>
-          </a:xfrm>
-          <a:prstGeom prst="rect">
-            <a:avLst/>
-          </a:prstGeom>
-          <a:solidFill>
-            <a:srgbClr val="FFFFFF"/>
-          </a:solidFill>
-          <a:ln>
-            <a:noFill/>
-          </a:ln>
-          <a:effectLst/>
-        </p:spPr>
-        <p:txBody>
-          <a:bodyPr rtlCol="0" anchor="ctr"/>
-          <a:lstStyle/>
-          <a:p>
-            <a:pPr algn="ctr"/>
-          </a:p>
-        </p:txBody>
-      </p:sp>
-      <p:sp>
-        <p:nvSpPr>
-          <p:cNvPr id="48" name="Rectangle 47"/>
-          <p:cNvSpPr/>
-          <p:nvPr/>
-        </p:nvSpPr>
-        <p:spPr>
-          <a:xfrm>
-            <a:off x="6228000" y="4104000"/>
-            <a:ext cx="57600" cy="460800"/>
-          </a:xfrm>
-          <a:prstGeom prst="rect">
-            <a:avLst/>
-          </a:prstGeom>
-          <a:solidFill>
-            <a:srgbClr val="ED1B2F"/>
-          </a:solidFill>
-          <a:ln>
-            <a:noFill/>
-          </a:ln>
-          <a:effectLst/>
-        </p:spPr>
-        <p:txBody>
-          <a:bodyPr rtlCol="0" anchor="ctr"/>
-          <a:lstStyle/>
-          <a:p>
-            <a:pPr algn="ctr"/>
-          </a:p>
-        </p:txBody>
-      </p:sp>
-      <p:sp>
-        <p:nvSpPr>
-          <p:cNvPr id="49" name="TextBox 48"/>
+              <a:t>Rotation 1</a:t>
+            </a:r>
+          </a:p>
+        </p:txBody>
+      </p:sp>
+      <p:sp>
+        <p:nvSpPr>
+          <p:cNvPr id="51" name="Rectangle 50"/>
+          <p:cNvSpPr/>
+          <p:nvPr/>
+        </p:nvSpPr>
+        <p:spPr>
+          <a:xfrm>
+            <a:off x="7276320" y="4816800"/>
+            <a:ext cx="918720" cy="666000"/>
+          </a:xfrm>
+          <a:prstGeom prst="rect">
+            <a:avLst/>
+          </a:prstGeom>
+          <a:solidFill>
+            <a:srgbClr val="D9EFEF"/>
+          </a:solidFill>
+          <a:ln>
+            <a:noFill/>
+          </a:ln>
+          <a:effectLst/>
+        </p:spPr>
+        <p:txBody>
+          <a:bodyPr rtlCol="0" anchor="ctr"/>
+          <a:lstStyle/>
+          <a:p>
+            <a:pPr algn="ctr"/>
+          </a:p>
+        </p:txBody>
+      </p:sp>
+      <p:sp>
+        <p:nvSpPr>
+          <p:cNvPr id="52" name="Rectangle 51"/>
+          <p:cNvSpPr/>
+          <p:nvPr/>
+        </p:nvSpPr>
+        <p:spPr>
+          <a:xfrm>
+            <a:off x="7276320" y="4816800"/>
+            <a:ext cx="50400" cy="666000"/>
+          </a:xfrm>
+          <a:prstGeom prst="rect">
+            <a:avLst/>
+          </a:prstGeom>
+          <a:solidFill>
+            <a:srgbClr val="008080"/>
+          </a:solidFill>
+          <a:ln>
+            <a:noFill/>
+          </a:ln>
+          <a:effectLst/>
+        </p:spPr>
+        <p:txBody>
+          <a:bodyPr rtlCol="0" anchor="ctr"/>
+          <a:lstStyle/>
+          <a:p>
+            <a:pPr algn="ctr"/>
+          </a:p>
+        </p:txBody>
+      </p:sp>
+      <p:sp>
+        <p:nvSpPr>
+          <p:cNvPr id="53" name="TextBox 52"/>
           <p:cNvSpPr txBox="1"/>
           <p:nvPr/>
         </p:nvSpPr>
         <p:spPr>
           <a:xfrm>
-            <a:off x="6444000" y="4219200"/>
-            <a:ext cx="864000" cy="288000"/>
+            <a:off x="7276320" y="4953600"/>
+            <a:ext cx="918720" cy="432000"/>
           </a:xfrm>
           <a:prstGeom prst="rect">
             <a:avLst/>
@@ -11754,33 +11954,109 @@
           </a:bodyPr>
           <a:lstStyle/>
           <a:p>
-            <a:pPr algn="l">
+            <a:pPr algn="ctr">
               <a:lnSpc>
                 <a:spcPct val="100000"/>
               </a:lnSpc>
             </a:pPr>
             <a:r>
-              <a:rPr sz="1600" b="1">
-                <a:solidFill>
-                  <a:srgbClr val="1A1A2E"/>
+              <a:rPr sz="1500" b="1">
+                <a:solidFill>
+                  <a:srgbClr val="006A6A"/>
                 </a:solidFill>
                 <a:latin typeface="Barlow Condensed"/>
               </a:rPr>
-              <a:t>16h30</a:t>
-            </a:r>
-          </a:p>
-        </p:txBody>
-      </p:sp>
-      <p:sp>
-        <p:nvSpPr>
-          <p:cNvPr id="50" name="TextBox 49"/>
+              <a:t>14h30</a:t>
+            </a:r>
+          </a:p>
+          <a:p>
+            <a:pPr algn="ctr">
+              <a:lnSpc>
+                <a:spcPct val="150000"/>
+              </a:lnSpc>
+            </a:pPr>
+            <a:r>
+              <a:rPr sz="800" b="0">
+                <a:solidFill>
+                  <a:srgbClr val="4A4A49"/>
+                </a:solidFill>
+                <a:latin typeface="Barlow"/>
+              </a:rPr>
+              <a:t>Rotation 2</a:t>
+            </a:r>
+          </a:p>
+        </p:txBody>
+      </p:sp>
+      <p:sp>
+        <p:nvSpPr>
+          <p:cNvPr id="54" name="Rectangle 53"/>
+          <p:cNvSpPr/>
+          <p:nvPr/>
+        </p:nvSpPr>
+        <p:spPr>
+          <a:xfrm>
+            <a:off x="8324640" y="4816800"/>
+            <a:ext cx="918720" cy="666000"/>
+          </a:xfrm>
+          <a:prstGeom prst="rect">
+            <a:avLst/>
+          </a:prstGeom>
+          <a:solidFill>
+            <a:srgbClr val="D9EFEF"/>
+          </a:solidFill>
+          <a:ln>
+            <a:noFill/>
+          </a:ln>
+          <a:effectLst/>
+        </p:spPr>
+        <p:txBody>
+          <a:bodyPr rtlCol="0" anchor="ctr"/>
+          <a:lstStyle/>
+          <a:p>
+            <a:pPr algn="ctr"/>
+          </a:p>
+        </p:txBody>
+      </p:sp>
+      <p:sp>
+        <p:nvSpPr>
+          <p:cNvPr id="55" name="Rectangle 54"/>
+          <p:cNvSpPr/>
+          <p:nvPr/>
+        </p:nvSpPr>
+        <p:spPr>
+          <a:xfrm>
+            <a:off x="8324640" y="4816800"/>
+            <a:ext cx="50400" cy="666000"/>
+          </a:xfrm>
+          <a:prstGeom prst="rect">
+            <a:avLst/>
+          </a:prstGeom>
+          <a:solidFill>
+            <a:srgbClr val="008080"/>
+          </a:solidFill>
+          <a:ln>
+            <a:noFill/>
+          </a:ln>
+          <a:effectLst/>
+        </p:spPr>
+        <p:txBody>
+          <a:bodyPr rtlCol="0" anchor="ctr"/>
+          <a:lstStyle/>
+          <a:p>
+            <a:pPr algn="ctr"/>
+          </a:p>
+        </p:txBody>
+      </p:sp>
+      <p:sp>
+        <p:nvSpPr>
+          <p:cNvPr id="56" name="TextBox 55"/>
           <p:cNvSpPr txBox="1"/>
           <p:nvPr/>
         </p:nvSpPr>
         <p:spPr>
           <a:xfrm>
-            <a:off x="7380000" y="4233600"/>
-            <a:ext cx="3816000" cy="324000"/>
+            <a:off x="8324640" y="4953600"/>
+            <a:ext cx="918720" cy="432000"/>
           </a:xfrm>
           <a:prstGeom prst="rect">
             <a:avLst/>
@@ -11793,15 +12069,399 @@
           </a:bodyPr>
           <a:lstStyle/>
           <a:p>
+            <a:pPr algn="ctr">
+              <a:lnSpc>
+                <a:spcPct val="100000"/>
+              </a:lnSpc>
+            </a:pPr>
+            <a:r>
+              <a:rPr sz="1500" b="1">
+                <a:solidFill>
+                  <a:srgbClr val="006A6A"/>
+                </a:solidFill>
+                <a:latin typeface="Barlow Condensed"/>
+              </a:rPr>
+              <a:t>15h00</a:t>
+            </a:r>
+          </a:p>
+          <a:p>
+            <a:pPr algn="ctr">
+              <a:lnSpc>
+                <a:spcPct val="150000"/>
+              </a:lnSpc>
+            </a:pPr>
+            <a:r>
+              <a:rPr sz="800" b="0">
+                <a:solidFill>
+                  <a:srgbClr val="4A4A49"/>
+                </a:solidFill>
+                <a:latin typeface="Barlow"/>
+              </a:rPr>
+              <a:t>Rotation 3</a:t>
+            </a:r>
+          </a:p>
+        </p:txBody>
+      </p:sp>
+      <p:sp>
+        <p:nvSpPr>
+          <p:cNvPr id="57" name="Rectangle 56"/>
+          <p:cNvSpPr/>
+          <p:nvPr/>
+        </p:nvSpPr>
+        <p:spPr>
+          <a:xfrm>
+            <a:off x="9372960" y="4816800"/>
+            <a:ext cx="918720" cy="666000"/>
+          </a:xfrm>
+          <a:prstGeom prst="rect">
+            <a:avLst/>
+          </a:prstGeom>
+          <a:solidFill>
+            <a:srgbClr val="D9EFEF"/>
+          </a:solidFill>
+          <a:ln>
+            <a:noFill/>
+          </a:ln>
+          <a:effectLst/>
+        </p:spPr>
+        <p:txBody>
+          <a:bodyPr rtlCol="0" anchor="ctr"/>
+          <a:lstStyle/>
+          <a:p>
+            <a:pPr algn="ctr"/>
+          </a:p>
+        </p:txBody>
+      </p:sp>
+      <p:sp>
+        <p:nvSpPr>
+          <p:cNvPr id="58" name="Rectangle 57"/>
+          <p:cNvSpPr/>
+          <p:nvPr/>
+        </p:nvSpPr>
+        <p:spPr>
+          <a:xfrm>
+            <a:off x="9372960" y="4816800"/>
+            <a:ext cx="50400" cy="666000"/>
+          </a:xfrm>
+          <a:prstGeom prst="rect">
+            <a:avLst/>
+          </a:prstGeom>
+          <a:solidFill>
+            <a:srgbClr val="008080"/>
+          </a:solidFill>
+          <a:ln>
+            <a:noFill/>
+          </a:ln>
+          <a:effectLst/>
+        </p:spPr>
+        <p:txBody>
+          <a:bodyPr rtlCol="0" anchor="ctr"/>
+          <a:lstStyle/>
+          <a:p>
+            <a:pPr algn="ctr"/>
+          </a:p>
+        </p:txBody>
+      </p:sp>
+      <p:sp>
+        <p:nvSpPr>
+          <p:cNvPr id="59" name="TextBox 58"/>
+          <p:cNvSpPr txBox="1"/>
+          <p:nvPr/>
+        </p:nvSpPr>
+        <p:spPr>
+          <a:xfrm>
+            <a:off x="9372960" y="4953600"/>
+            <a:ext cx="918720" cy="432000"/>
+          </a:xfrm>
+          <a:prstGeom prst="rect">
+            <a:avLst/>
+          </a:prstGeom>
+          <a:noFill/>
+        </p:spPr>
+        <p:txBody>
+          <a:bodyPr wrap="square" anchor="t" lIns="0" rIns="0" tIns="0" bIns="0">
+            <a:spAutoFit/>
+          </a:bodyPr>
+          <a:lstStyle/>
+          <a:p>
+            <a:pPr algn="ctr">
+              <a:lnSpc>
+                <a:spcPct val="100000"/>
+              </a:lnSpc>
+            </a:pPr>
+            <a:r>
+              <a:rPr sz="1500" b="1">
+                <a:solidFill>
+                  <a:srgbClr val="006A6A"/>
+                </a:solidFill>
+                <a:latin typeface="Barlow Condensed"/>
+              </a:rPr>
+              <a:t>15h30</a:t>
+            </a:r>
+          </a:p>
+          <a:p>
+            <a:pPr algn="ctr">
+              <a:lnSpc>
+                <a:spcPct val="150000"/>
+              </a:lnSpc>
+            </a:pPr>
+            <a:r>
+              <a:rPr sz="800" b="0">
+                <a:solidFill>
+                  <a:srgbClr val="4A4A49"/>
+                </a:solidFill>
+                <a:latin typeface="Barlow"/>
+              </a:rPr>
+              <a:t>Rotation 4</a:t>
+            </a:r>
+          </a:p>
+        </p:txBody>
+      </p:sp>
+      <p:sp>
+        <p:nvSpPr>
+          <p:cNvPr id="60" name="Rectangle 59"/>
+          <p:cNvSpPr/>
+          <p:nvPr/>
+        </p:nvSpPr>
+        <p:spPr>
+          <a:xfrm>
+            <a:off x="10421280" y="4816800"/>
+            <a:ext cx="918720" cy="666000"/>
+          </a:xfrm>
+          <a:prstGeom prst="rect">
+            <a:avLst/>
+          </a:prstGeom>
+          <a:solidFill>
+            <a:srgbClr val="D9EFEF"/>
+          </a:solidFill>
+          <a:ln>
+            <a:noFill/>
+          </a:ln>
+          <a:effectLst/>
+        </p:spPr>
+        <p:txBody>
+          <a:bodyPr rtlCol="0" anchor="ctr"/>
+          <a:lstStyle/>
+          <a:p>
+            <a:pPr algn="ctr"/>
+          </a:p>
+        </p:txBody>
+      </p:sp>
+      <p:sp>
+        <p:nvSpPr>
+          <p:cNvPr id="61" name="Rectangle 60"/>
+          <p:cNvSpPr/>
+          <p:nvPr/>
+        </p:nvSpPr>
+        <p:spPr>
+          <a:xfrm>
+            <a:off x="10421280" y="4816800"/>
+            <a:ext cx="50400" cy="666000"/>
+          </a:xfrm>
+          <a:prstGeom prst="rect">
+            <a:avLst/>
+          </a:prstGeom>
+          <a:solidFill>
+            <a:srgbClr val="008080"/>
+          </a:solidFill>
+          <a:ln>
+            <a:noFill/>
+          </a:ln>
+          <a:effectLst/>
+        </p:spPr>
+        <p:txBody>
+          <a:bodyPr rtlCol="0" anchor="ctr"/>
+          <a:lstStyle/>
+          <a:p>
+            <a:pPr algn="ctr"/>
+          </a:p>
+        </p:txBody>
+      </p:sp>
+      <p:sp>
+        <p:nvSpPr>
+          <p:cNvPr id="62" name="TextBox 61"/>
+          <p:cNvSpPr txBox="1"/>
+          <p:nvPr/>
+        </p:nvSpPr>
+        <p:spPr>
+          <a:xfrm>
+            <a:off x="10421280" y="4953600"/>
+            <a:ext cx="918720" cy="432000"/>
+          </a:xfrm>
+          <a:prstGeom prst="rect">
+            <a:avLst/>
+          </a:prstGeom>
+          <a:noFill/>
+        </p:spPr>
+        <p:txBody>
+          <a:bodyPr wrap="square" anchor="t" lIns="0" rIns="0" tIns="0" bIns="0">
+            <a:spAutoFit/>
+          </a:bodyPr>
+          <a:lstStyle/>
+          <a:p>
+            <a:pPr algn="ctr">
+              <a:lnSpc>
+                <a:spcPct val="100000"/>
+              </a:lnSpc>
+            </a:pPr>
+            <a:r>
+              <a:rPr sz="1500" b="1">
+                <a:solidFill>
+                  <a:srgbClr val="006A6A"/>
+                </a:solidFill>
+                <a:latin typeface="Barlow Condensed"/>
+              </a:rPr>
+              <a:t>16h00</a:t>
+            </a:r>
+          </a:p>
+          <a:p>
+            <a:pPr algn="ctr">
+              <a:lnSpc>
+                <a:spcPct val="150000"/>
+              </a:lnSpc>
+            </a:pPr>
+            <a:r>
+              <a:rPr sz="800" b="0">
+                <a:solidFill>
+                  <a:srgbClr val="4A4A49"/>
+                </a:solidFill>
+                <a:latin typeface="Barlow"/>
+              </a:rPr>
+              <a:t>Rotation 5</a:t>
+            </a:r>
+          </a:p>
+        </p:txBody>
+      </p:sp>
+      <p:sp>
+        <p:nvSpPr>
+          <p:cNvPr id="63" name="Rectangle 62"/>
+          <p:cNvSpPr/>
+          <p:nvPr/>
+        </p:nvSpPr>
+        <p:spPr>
+          <a:xfrm>
+            <a:off x="6228000" y="5778000"/>
+            <a:ext cx="990000" cy="439200"/>
+          </a:xfrm>
+          <a:prstGeom prst="rect">
+            <a:avLst/>
+          </a:prstGeom>
+          <a:solidFill>
+            <a:srgbClr val="008080"/>
+          </a:solidFill>
+          <a:ln>
+            <a:noFill/>
+          </a:ln>
+          <a:effectLst/>
+        </p:spPr>
+        <p:txBody>
+          <a:bodyPr rtlCol="0" anchor="ctr"/>
+          <a:lstStyle/>
+          <a:p>
+            <a:pPr algn="ctr"/>
+          </a:p>
+        </p:txBody>
+      </p:sp>
+      <p:sp>
+        <p:nvSpPr>
+          <p:cNvPr id="64" name="Rectangle 63"/>
+          <p:cNvSpPr/>
+          <p:nvPr/>
+        </p:nvSpPr>
+        <p:spPr>
+          <a:xfrm>
+            <a:off x="7218000" y="5778000"/>
+            <a:ext cx="4122000" cy="439200"/>
+          </a:xfrm>
+          <a:prstGeom prst="rect">
+            <a:avLst/>
+          </a:prstGeom>
+          <a:solidFill>
+            <a:srgbClr val="E0F7F7"/>
+          </a:solidFill>
+          <a:ln>
+            <a:noFill/>
+          </a:ln>
+          <a:effectLst/>
+        </p:spPr>
+        <p:txBody>
+          <a:bodyPr rtlCol="0" anchor="ctr"/>
+          <a:lstStyle/>
+          <a:p>
+            <a:pPr algn="ctr"/>
+          </a:p>
+        </p:txBody>
+      </p:sp>
+      <p:sp>
+        <p:nvSpPr>
+          <p:cNvPr id="65" name="TextBox 64"/>
+          <p:cNvSpPr txBox="1"/>
+          <p:nvPr/>
+        </p:nvSpPr>
+        <p:spPr>
+          <a:xfrm>
+            <a:off x="6228000" y="5886000"/>
+            <a:ext cx="990000" cy="251999"/>
+          </a:xfrm>
+          <a:prstGeom prst="rect">
+            <a:avLst/>
+          </a:prstGeom>
+          <a:noFill/>
+        </p:spPr>
+        <p:txBody>
+          <a:bodyPr wrap="square" anchor="t" lIns="0" rIns="0" tIns="0" bIns="0">
+            <a:spAutoFit/>
+          </a:bodyPr>
+          <a:lstStyle/>
+          <a:p>
+            <a:pPr algn="ctr">
+              <a:lnSpc>
+                <a:spcPct val="100000"/>
+              </a:lnSpc>
+            </a:pPr>
+            <a:r>
+              <a:rPr sz="1600" b="1">
+                <a:solidFill>
+                  <a:srgbClr val="FFFFFF"/>
+                </a:solidFill>
+                <a:latin typeface="Barlow Condensed"/>
+              </a:rPr>
+              <a:t>16h30</a:t>
+            </a:r>
+          </a:p>
+        </p:txBody>
+      </p:sp>
+      <p:sp>
+        <p:nvSpPr>
+          <p:cNvPr id="66" name="TextBox 65"/>
+          <p:cNvSpPr txBox="1"/>
+          <p:nvPr/>
+        </p:nvSpPr>
+        <p:spPr>
+          <a:xfrm>
+            <a:off x="7416000" y="5893200"/>
+            <a:ext cx="3762000" cy="251999"/>
+          </a:xfrm>
+          <a:prstGeom prst="rect">
+            <a:avLst/>
+          </a:prstGeom>
+          <a:noFill/>
+        </p:spPr>
+        <p:txBody>
+          <a:bodyPr wrap="square" anchor="t" lIns="0" rIns="0" tIns="0" bIns="0">
+            <a:spAutoFit/>
+          </a:bodyPr>
+          <a:lstStyle/>
+          <a:p>
             <a:pPr algn="l">
               <a:lnSpc>
-                <a:spcPct val="110000"/>
-              </a:lnSpc>
-            </a:pPr>
-            <a:r>
-              <a:rPr sz="1200" b="0">
-                <a:solidFill>
-                  <a:srgbClr val="1A1A2E"/>
+                <a:spcPct val="100000"/>
+              </a:lnSpc>
+            </a:pPr>
+            <a:r>
+              <a:rPr sz="1250" b="1">
+                <a:solidFill>
+                  <a:srgbClr val="006A6A"/>
                 </a:solidFill>
                 <a:latin typeface="Barlow"/>
               </a:rPr>

--- a/outils/affiches/presentation-testing-event.pptx
+++ b/outils/affiches/presentation-testing-event.pptx
@@ -3762,43 +3762,43 @@
         <p:spPr>
           <a:xfrm>
             <a:off x="792000" y="2592000"/>
-            <a:ext cx="5184000" cy="691200"/>
+            <a:ext cx="413999" cy="691200"/>
+          </a:xfrm>
+          <a:prstGeom prst="rect">
+            <a:avLst/>
+          </a:prstGeom>
+          <a:solidFill>
+            <a:srgbClr val="008080"/>
+          </a:solidFill>
+          <a:ln>
+            <a:noFill/>
+          </a:ln>
+          <a:effectLst/>
+        </p:spPr>
+        <p:txBody>
+          <a:bodyPr rtlCol="0" anchor="ctr"/>
+          <a:lstStyle/>
+          <a:p>
+            <a:pPr algn="ctr"/>
+          </a:p>
+        </p:txBody>
+      </p:sp>
+      <p:sp>
+        <p:nvSpPr>
+          <p:cNvPr id="14" name="Rectangle 13"/>
+          <p:cNvSpPr/>
+          <p:nvPr/>
+        </p:nvSpPr>
+        <p:spPr>
+          <a:xfrm>
+            <a:off x="1205999" y="2592000"/>
+            <a:ext cx="4770001" cy="691200"/>
           </a:xfrm>
           <a:prstGeom prst="rect">
             <a:avLst/>
           </a:prstGeom>
           <a:solidFill>
             <a:srgbClr val="FFFFFF"/>
-          </a:solidFill>
-          <a:ln>
-            <a:noFill/>
-          </a:ln>
-          <a:effectLst/>
-        </p:spPr>
-        <p:txBody>
-          <a:bodyPr rtlCol="0" anchor="ctr"/>
-          <a:lstStyle/>
-          <a:p>
-            <a:pPr algn="ctr"/>
-          </a:p>
-        </p:txBody>
-      </p:sp>
-      <p:sp>
-        <p:nvSpPr>
-          <p:cNvPr id="14" name="Rectangle 13"/>
-          <p:cNvSpPr/>
-          <p:nvPr/>
-        </p:nvSpPr>
-        <p:spPr>
-          <a:xfrm>
-            <a:off x="792000" y="2592000"/>
-            <a:ext cx="57600" cy="691200"/>
-          </a:xfrm>
-          <a:prstGeom prst="rect">
-            <a:avLst/>
-          </a:prstGeom>
-          <a:solidFill>
-            <a:srgbClr val="008080"/>
           </a:solidFill>
           <a:ln>
             <a:noFill/>
@@ -3821,8 +3821,8 @@
         </p:nvSpPr>
         <p:spPr>
           <a:xfrm>
-            <a:off x="972000" y="2728800"/>
-            <a:ext cx="540000" cy="360000"/>
+            <a:off x="792000" y="2808000"/>
+            <a:ext cx="413999" cy="288000"/>
           </a:xfrm>
           <a:prstGeom prst="rect">
             <a:avLst/>
@@ -3835,15 +3835,15 @@
           </a:bodyPr>
           <a:lstStyle/>
           <a:p>
-            <a:pPr algn="l">
+            <a:pPr algn="ctr">
               <a:lnSpc>
                 <a:spcPct val="100000"/>
               </a:lnSpc>
             </a:pPr>
             <a:r>
-              <a:rPr sz="2200" b="1">
-                <a:solidFill>
-                  <a:srgbClr val="006A6A"/>
+              <a:rPr sz="1900" b="1">
+                <a:solidFill>
+                  <a:srgbClr val="FFFFFF"/>
                 </a:solidFill>
                 <a:latin typeface="Barlow Condensed"/>
               </a:rPr>
@@ -3860,8 +3860,8 @@
         </p:nvSpPr>
         <p:spPr>
           <a:xfrm>
-            <a:off x="1619999" y="2692800"/>
-            <a:ext cx="4176001" cy="503999"/>
+            <a:off x="1385999" y="2685600"/>
+            <a:ext cx="4446001" cy="503999"/>
           </a:xfrm>
           <a:prstGeom prst="rect">
             <a:avLst/>
@@ -3892,7 +3892,7 @@
           <a:p>
             <a:pPr algn="l">
               <a:lnSpc>
-                <a:spcPct val="135000"/>
+                <a:spcPct val="140000"/>
               </a:lnSpc>
             </a:pPr>
             <a:r>
@@ -3915,44 +3915,44 @@
         </p:nvSpPr>
         <p:spPr>
           <a:xfrm>
-            <a:off x="792000" y="3333600"/>
-            <a:ext cx="5184000" cy="691200"/>
+            <a:off x="6217200" y="2592000"/>
+            <a:ext cx="413999" cy="691200"/>
+          </a:xfrm>
+          <a:prstGeom prst="rect">
+            <a:avLst/>
+          </a:prstGeom>
+          <a:solidFill>
+            <a:srgbClr val="C01020"/>
+          </a:solidFill>
+          <a:ln>
+            <a:noFill/>
+          </a:ln>
+          <a:effectLst/>
+        </p:spPr>
+        <p:txBody>
+          <a:bodyPr rtlCol="0" anchor="ctr"/>
+          <a:lstStyle/>
+          <a:p>
+            <a:pPr algn="ctr"/>
+          </a:p>
+        </p:txBody>
+      </p:sp>
+      <p:sp>
+        <p:nvSpPr>
+          <p:cNvPr id="18" name="Rectangle 17"/>
+          <p:cNvSpPr/>
+          <p:nvPr/>
+        </p:nvSpPr>
+        <p:spPr>
+          <a:xfrm>
+            <a:off x="6631199" y="2592000"/>
+            <a:ext cx="4770001" cy="691200"/>
           </a:xfrm>
           <a:prstGeom prst="rect">
             <a:avLst/>
           </a:prstGeom>
           <a:solidFill>
             <a:srgbClr val="FFFFFF"/>
-          </a:solidFill>
-          <a:ln>
-            <a:noFill/>
-          </a:ln>
-          <a:effectLst/>
-        </p:spPr>
-        <p:txBody>
-          <a:bodyPr rtlCol="0" anchor="ctr"/>
-          <a:lstStyle/>
-          <a:p>
-            <a:pPr algn="ctr"/>
-          </a:p>
-        </p:txBody>
-      </p:sp>
-      <p:sp>
-        <p:nvSpPr>
-          <p:cNvPr id="18" name="Rectangle 17"/>
-          <p:cNvSpPr/>
-          <p:nvPr/>
-        </p:nvSpPr>
-        <p:spPr>
-          <a:xfrm>
-            <a:off x="792000" y="3333600"/>
-            <a:ext cx="57600" cy="691200"/>
-          </a:xfrm>
-          <a:prstGeom prst="rect">
-            <a:avLst/>
-          </a:prstGeom>
-          <a:solidFill>
-            <a:srgbClr val="008080"/>
           </a:solidFill>
           <a:ln>
             <a:noFill/>
@@ -3975,8 +3975,8 @@
         </p:nvSpPr>
         <p:spPr>
           <a:xfrm>
-            <a:off x="972000" y="3470400"/>
-            <a:ext cx="540000" cy="360000"/>
+            <a:off x="6217200" y="2808000"/>
+            <a:ext cx="413999" cy="288000"/>
           </a:xfrm>
           <a:prstGeom prst="rect">
             <a:avLst/>
@@ -3989,15 +3989,15 @@
           </a:bodyPr>
           <a:lstStyle/>
           <a:p>
-            <a:pPr algn="l">
+            <a:pPr algn="ctr">
               <a:lnSpc>
                 <a:spcPct val="100000"/>
               </a:lnSpc>
             </a:pPr>
             <a:r>
-              <a:rPr sz="2200" b="1">
-                <a:solidFill>
-                  <a:srgbClr val="006A6A"/>
+              <a:rPr sz="1900" b="1">
+                <a:solidFill>
+                  <a:srgbClr val="FFFFFF"/>
                 </a:solidFill>
                 <a:latin typeface="Barlow Condensed"/>
               </a:rPr>
@@ -4014,8 +4014,8 @@
         </p:nvSpPr>
         <p:spPr>
           <a:xfrm>
-            <a:off x="1619999" y="3434400"/>
-            <a:ext cx="4176001" cy="503999"/>
+            <a:off x="6811199" y="2685600"/>
+            <a:ext cx="4446001" cy="503999"/>
           </a:xfrm>
           <a:prstGeom prst="rect">
             <a:avLst/>
@@ -4046,7 +4046,7 @@
           <a:p>
             <a:pPr algn="l">
               <a:lnSpc>
-                <a:spcPct val="135000"/>
+                <a:spcPct val="140000"/>
               </a:lnSpc>
             </a:pPr>
             <a:r>
@@ -4069,44 +4069,44 @@
         </p:nvSpPr>
         <p:spPr>
           <a:xfrm>
-            <a:off x="792000" y="4075200"/>
-            <a:ext cx="5184000" cy="691200"/>
+            <a:off x="792000" y="3333600"/>
+            <a:ext cx="413999" cy="691200"/>
+          </a:xfrm>
+          <a:prstGeom prst="rect">
+            <a:avLst/>
+          </a:prstGeom>
+          <a:solidFill>
+            <a:srgbClr val="008080"/>
+          </a:solidFill>
+          <a:ln>
+            <a:noFill/>
+          </a:ln>
+          <a:effectLst/>
+        </p:spPr>
+        <p:txBody>
+          <a:bodyPr rtlCol="0" anchor="ctr"/>
+          <a:lstStyle/>
+          <a:p>
+            <a:pPr algn="ctr"/>
+          </a:p>
+        </p:txBody>
+      </p:sp>
+      <p:sp>
+        <p:nvSpPr>
+          <p:cNvPr id="22" name="Rectangle 21"/>
+          <p:cNvSpPr/>
+          <p:nvPr/>
+        </p:nvSpPr>
+        <p:spPr>
+          <a:xfrm>
+            <a:off x="1205999" y="3333600"/>
+            <a:ext cx="4770001" cy="691200"/>
           </a:xfrm>
           <a:prstGeom prst="rect">
             <a:avLst/>
           </a:prstGeom>
           <a:solidFill>
             <a:srgbClr val="FFFFFF"/>
-          </a:solidFill>
-          <a:ln>
-            <a:noFill/>
-          </a:ln>
-          <a:effectLst/>
-        </p:spPr>
-        <p:txBody>
-          <a:bodyPr rtlCol="0" anchor="ctr"/>
-          <a:lstStyle/>
-          <a:p>
-            <a:pPr algn="ctr"/>
-          </a:p>
-        </p:txBody>
-      </p:sp>
-      <p:sp>
-        <p:nvSpPr>
-          <p:cNvPr id="22" name="Rectangle 21"/>
-          <p:cNvSpPr/>
-          <p:nvPr/>
-        </p:nvSpPr>
-        <p:spPr>
-          <a:xfrm>
-            <a:off x="792000" y="4075200"/>
-            <a:ext cx="57600" cy="691200"/>
-          </a:xfrm>
-          <a:prstGeom prst="rect">
-            <a:avLst/>
-          </a:prstGeom>
-          <a:solidFill>
-            <a:srgbClr val="008080"/>
           </a:solidFill>
           <a:ln>
             <a:noFill/>
@@ -4129,8 +4129,8 @@
         </p:nvSpPr>
         <p:spPr>
           <a:xfrm>
-            <a:off x="972000" y="4212000"/>
-            <a:ext cx="540000" cy="360000"/>
+            <a:off x="792000" y="3549600"/>
+            <a:ext cx="413999" cy="288000"/>
           </a:xfrm>
           <a:prstGeom prst="rect">
             <a:avLst/>
@@ -4143,15 +4143,15 @@
           </a:bodyPr>
           <a:lstStyle/>
           <a:p>
-            <a:pPr algn="l">
+            <a:pPr algn="ctr">
               <a:lnSpc>
                 <a:spcPct val="100000"/>
               </a:lnSpc>
             </a:pPr>
             <a:r>
-              <a:rPr sz="2200" b="1">
-                <a:solidFill>
-                  <a:srgbClr val="006A6A"/>
+              <a:rPr sz="1900" b="1">
+                <a:solidFill>
+                  <a:srgbClr val="FFFFFF"/>
                 </a:solidFill>
                 <a:latin typeface="Barlow Condensed"/>
               </a:rPr>
@@ -4168,8 +4168,8 @@
         </p:nvSpPr>
         <p:spPr>
           <a:xfrm>
-            <a:off x="1619999" y="4176000"/>
-            <a:ext cx="4176001" cy="503999"/>
+            <a:off x="1385999" y="3427200"/>
+            <a:ext cx="4446001" cy="503999"/>
           </a:xfrm>
           <a:prstGeom prst="rect">
             <a:avLst/>
@@ -4200,7 +4200,7 @@
           <a:p>
             <a:pPr algn="l">
               <a:lnSpc>
-                <a:spcPct val="135000"/>
+                <a:spcPct val="140000"/>
               </a:lnSpc>
             </a:pPr>
             <a:r>
@@ -4223,44 +4223,44 @@
         </p:nvSpPr>
         <p:spPr>
           <a:xfrm>
-            <a:off x="792000" y="4816800"/>
-            <a:ext cx="5184000" cy="691200"/>
+            <a:off x="6217200" y="3333600"/>
+            <a:ext cx="413999" cy="691200"/>
+          </a:xfrm>
+          <a:prstGeom prst="rect">
+            <a:avLst/>
+          </a:prstGeom>
+          <a:solidFill>
+            <a:srgbClr val="C01020"/>
+          </a:solidFill>
+          <a:ln>
+            <a:noFill/>
+          </a:ln>
+          <a:effectLst/>
+        </p:spPr>
+        <p:txBody>
+          <a:bodyPr rtlCol="0" anchor="ctr"/>
+          <a:lstStyle/>
+          <a:p>
+            <a:pPr algn="ctr"/>
+          </a:p>
+        </p:txBody>
+      </p:sp>
+      <p:sp>
+        <p:nvSpPr>
+          <p:cNvPr id="26" name="Rectangle 25"/>
+          <p:cNvSpPr/>
+          <p:nvPr/>
+        </p:nvSpPr>
+        <p:spPr>
+          <a:xfrm>
+            <a:off x="6631199" y="3333600"/>
+            <a:ext cx="4770001" cy="691200"/>
           </a:xfrm>
           <a:prstGeom prst="rect">
             <a:avLst/>
           </a:prstGeom>
           <a:solidFill>
             <a:srgbClr val="FFFFFF"/>
-          </a:solidFill>
-          <a:ln>
-            <a:noFill/>
-          </a:ln>
-          <a:effectLst/>
-        </p:spPr>
-        <p:txBody>
-          <a:bodyPr rtlCol="0" anchor="ctr"/>
-          <a:lstStyle/>
-          <a:p>
-            <a:pPr algn="ctr"/>
-          </a:p>
-        </p:txBody>
-      </p:sp>
-      <p:sp>
-        <p:nvSpPr>
-          <p:cNvPr id="26" name="Rectangle 25"/>
-          <p:cNvSpPr/>
-          <p:nvPr/>
-        </p:nvSpPr>
-        <p:spPr>
-          <a:xfrm>
-            <a:off x="792000" y="4816800"/>
-            <a:ext cx="57600" cy="691200"/>
-          </a:xfrm>
-          <a:prstGeom prst="rect">
-            <a:avLst/>
-          </a:prstGeom>
-          <a:solidFill>
-            <a:srgbClr val="008080"/>
           </a:solidFill>
           <a:ln>
             <a:noFill/>
@@ -4283,8 +4283,8 @@
         </p:nvSpPr>
         <p:spPr>
           <a:xfrm>
-            <a:off x="972000" y="4953600"/>
-            <a:ext cx="540000" cy="360000"/>
+            <a:off x="6217200" y="3549600"/>
+            <a:ext cx="413999" cy="288000"/>
           </a:xfrm>
           <a:prstGeom prst="rect">
             <a:avLst/>
@@ -4297,15 +4297,15 @@
           </a:bodyPr>
           <a:lstStyle/>
           <a:p>
-            <a:pPr algn="l">
+            <a:pPr algn="ctr">
               <a:lnSpc>
                 <a:spcPct val="100000"/>
               </a:lnSpc>
             </a:pPr>
             <a:r>
-              <a:rPr sz="2200" b="1">
-                <a:solidFill>
-                  <a:srgbClr val="006A6A"/>
+              <a:rPr sz="1900" b="1">
+                <a:solidFill>
+                  <a:srgbClr val="FFFFFF"/>
                 </a:solidFill>
                 <a:latin typeface="Barlow Condensed"/>
               </a:rPr>
@@ -4322,8 +4322,8 @@
         </p:nvSpPr>
         <p:spPr>
           <a:xfrm>
-            <a:off x="1619999" y="4917600"/>
-            <a:ext cx="4176001" cy="503999"/>
+            <a:off x="6811199" y="3427200"/>
+            <a:ext cx="4446001" cy="503999"/>
           </a:xfrm>
           <a:prstGeom prst="rect">
             <a:avLst/>
@@ -4354,7 +4354,7 @@
           <a:p>
             <a:pPr algn="l">
               <a:lnSpc>
-                <a:spcPct val="135000"/>
+                <a:spcPct val="140000"/>
               </a:lnSpc>
             </a:pPr>
             <a:r>
@@ -4377,44 +4377,44 @@
         </p:nvSpPr>
         <p:spPr>
           <a:xfrm>
-            <a:off x="792000" y="5558400"/>
-            <a:ext cx="5184000" cy="691200"/>
+            <a:off x="792000" y="4075200"/>
+            <a:ext cx="413999" cy="691200"/>
+          </a:xfrm>
+          <a:prstGeom prst="rect">
+            <a:avLst/>
+          </a:prstGeom>
+          <a:solidFill>
+            <a:srgbClr val="008080"/>
+          </a:solidFill>
+          <a:ln>
+            <a:noFill/>
+          </a:ln>
+          <a:effectLst/>
+        </p:spPr>
+        <p:txBody>
+          <a:bodyPr rtlCol="0" anchor="ctr"/>
+          <a:lstStyle/>
+          <a:p>
+            <a:pPr algn="ctr"/>
+          </a:p>
+        </p:txBody>
+      </p:sp>
+      <p:sp>
+        <p:nvSpPr>
+          <p:cNvPr id="30" name="Rectangle 29"/>
+          <p:cNvSpPr/>
+          <p:nvPr/>
+        </p:nvSpPr>
+        <p:spPr>
+          <a:xfrm>
+            <a:off x="1205999" y="4075200"/>
+            <a:ext cx="4770001" cy="691200"/>
           </a:xfrm>
           <a:prstGeom prst="rect">
             <a:avLst/>
           </a:prstGeom>
           <a:solidFill>
             <a:srgbClr val="FFFFFF"/>
-          </a:solidFill>
-          <a:ln>
-            <a:noFill/>
-          </a:ln>
-          <a:effectLst/>
-        </p:spPr>
-        <p:txBody>
-          <a:bodyPr rtlCol="0" anchor="ctr"/>
-          <a:lstStyle/>
-          <a:p>
-            <a:pPr algn="ctr"/>
-          </a:p>
-        </p:txBody>
-      </p:sp>
-      <p:sp>
-        <p:nvSpPr>
-          <p:cNvPr id="30" name="Rectangle 29"/>
-          <p:cNvSpPr/>
-          <p:nvPr/>
-        </p:nvSpPr>
-        <p:spPr>
-          <a:xfrm>
-            <a:off x="792000" y="5558400"/>
-            <a:ext cx="57600" cy="691200"/>
-          </a:xfrm>
-          <a:prstGeom prst="rect">
-            <a:avLst/>
-          </a:prstGeom>
-          <a:solidFill>
-            <a:srgbClr val="008080"/>
           </a:solidFill>
           <a:ln>
             <a:noFill/>
@@ -4437,8 +4437,8 @@
         </p:nvSpPr>
         <p:spPr>
           <a:xfrm>
-            <a:off x="972000" y="5695200"/>
-            <a:ext cx="540000" cy="360000"/>
+            <a:off x="792000" y="4291200"/>
+            <a:ext cx="413999" cy="288000"/>
           </a:xfrm>
           <a:prstGeom prst="rect">
             <a:avLst/>
@@ -4451,15 +4451,15 @@
           </a:bodyPr>
           <a:lstStyle/>
           <a:p>
-            <a:pPr algn="l">
+            <a:pPr algn="ctr">
               <a:lnSpc>
                 <a:spcPct val="100000"/>
               </a:lnSpc>
             </a:pPr>
             <a:r>
-              <a:rPr sz="2200" b="1">
-                <a:solidFill>
-                  <a:srgbClr val="006A6A"/>
+              <a:rPr sz="1900" b="1">
+                <a:solidFill>
+                  <a:srgbClr val="FFFFFF"/>
                 </a:solidFill>
                 <a:latin typeface="Barlow Condensed"/>
               </a:rPr>
@@ -4476,8 +4476,8 @@
         </p:nvSpPr>
         <p:spPr>
           <a:xfrm>
-            <a:off x="1619999" y="5659200"/>
-            <a:ext cx="4176001" cy="503999"/>
+            <a:off x="1385999" y="4168800"/>
+            <a:ext cx="4446001" cy="503999"/>
           </a:xfrm>
           <a:prstGeom prst="rect">
             <a:avLst/>
@@ -4508,7 +4508,7 @@
           <a:p>
             <a:pPr algn="l">
               <a:lnSpc>
-                <a:spcPct val="135000"/>
+                <a:spcPct val="140000"/>
               </a:lnSpc>
             </a:pPr>
             <a:r>
@@ -4531,44 +4531,44 @@
         </p:nvSpPr>
         <p:spPr>
           <a:xfrm>
-            <a:off x="6217200" y="2592000"/>
-            <a:ext cx="5184000" cy="691200"/>
+            <a:off x="6217200" y="4075200"/>
+            <a:ext cx="413999" cy="691200"/>
+          </a:xfrm>
+          <a:prstGeom prst="rect">
+            <a:avLst/>
+          </a:prstGeom>
+          <a:solidFill>
+            <a:srgbClr val="C01020"/>
+          </a:solidFill>
+          <a:ln>
+            <a:noFill/>
+          </a:ln>
+          <a:effectLst/>
+        </p:spPr>
+        <p:txBody>
+          <a:bodyPr rtlCol="0" anchor="ctr"/>
+          <a:lstStyle/>
+          <a:p>
+            <a:pPr algn="ctr"/>
+          </a:p>
+        </p:txBody>
+      </p:sp>
+      <p:sp>
+        <p:nvSpPr>
+          <p:cNvPr id="34" name="Rectangle 33"/>
+          <p:cNvSpPr/>
+          <p:nvPr/>
+        </p:nvSpPr>
+        <p:spPr>
+          <a:xfrm>
+            <a:off x="6631199" y="4075200"/>
+            <a:ext cx="4770001" cy="691200"/>
           </a:xfrm>
           <a:prstGeom prst="rect">
             <a:avLst/>
           </a:prstGeom>
           <a:solidFill>
             <a:srgbClr val="FFFFFF"/>
-          </a:solidFill>
-          <a:ln>
-            <a:noFill/>
-          </a:ln>
-          <a:effectLst/>
-        </p:spPr>
-        <p:txBody>
-          <a:bodyPr rtlCol="0" anchor="ctr"/>
-          <a:lstStyle/>
-          <a:p>
-            <a:pPr algn="ctr"/>
-          </a:p>
-        </p:txBody>
-      </p:sp>
-      <p:sp>
-        <p:nvSpPr>
-          <p:cNvPr id="34" name="Rectangle 33"/>
-          <p:cNvSpPr/>
-          <p:nvPr/>
-        </p:nvSpPr>
-        <p:spPr>
-          <a:xfrm>
-            <a:off x="6217200" y="2592000"/>
-            <a:ext cx="57600" cy="691200"/>
-          </a:xfrm>
-          <a:prstGeom prst="rect">
-            <a:avLst/>
-          </a:prstGeom>
-          <a:solidFill>
-            <a:srgbClr val="ED1B2F"/>
           </a:solidFill>
           <a:ln>
             <a:noFill/>
@@ -4591,8 +4591,8 @@
         </p:nvSpPr>
         <p:spPr>
           <a:xfrm>
-            <a:off x="6397200" y="2728800"/>
-            <a:ext cx="540000" cy="360000"/>
+            <a:off x="6217200" y="4291200"/>
+            <a:ext cx="413999" cy="288000"/>
           </a:xfrm>
           <a:prstGeom prst="rect">
             <a:avLst/>
@@ -4605,15 +4605,15 @@
           </a:bodyPr>
           <a:lstStyle/>
           <a:p>
-            <a:pPr algn="l">
+            <a:pPr algn="ctr">
               <a:lnSpc>
                 <a:spcPct val="100000"/>
               </a:lnSpc>
             </a:pPr>
             <a:r>
-              <a:rPr sz="2200" b="1">
-                <a:solidFill>
-                  <a:srgbClr val="C01020"/>
+              <a:rPr sz="1900" b="1">
+                <a:solidFill>
+                  <a:srgbClr val="FFFFFF"/>
                 </a:solidFill>
                 <a:latin typeface="Barlow Condensed"/>
               </a:rPr>
@@ -4630,8 +4630,8 @@
         </p:nvSpPr>
         <p:spPr>
           <a:xfrm>
-            <a:off x="7045199" y="2692800"/>
-            <a:ext cx="4176001" cy="503999"/>
+            <a:off x="6811199" y="4168800"/>
+            <a:ext cx="4446001" cy="503999"/>
           </a:xfrm>
           <a:prstGeom prst="rect">
             <a:avLst/>
@@ -4662,7 +4662,7 @@
           <a:p>
             <a:pPr algn="l">
               <a:lnSpc>
-                <a:spcPct val="135000"/>
+                <a:spcPct val="140000"/>
               </a:lnSpc>
             </a:pPr>
             <a:r>
@@ -4685,44 +4685,44 @@
         </p:nvSpPr>
         <p:spPr>
           <a:xfrm>
-            <a:off x="6217200" y="3333600"/>
-            <a:ext cx="5184000" cy="691200"/>
+            <a:off x="792000" y="4816800"/>
+            <a:ext cx="413999" cy="691200"/>
+          </a:xfrm>
+          <a:prstGeom prst="rect">
+            <a:avLst/>
+          </a:prstGeom>
+          <a:solidFill>
+            <a:srgbClr val="008080"/>
+          </a:solidFill>
+          <a:ln>
+            <a:noFill/>
+          </a:ln>
+          <a:effectLst/>
+        </p:spPr>
+        <p:txBody>
+          <a:bodyPr rtlCol="0" anchor="ctr"/>
+          <a:lstStyle/>
+          <a:p>
+            <a:pPr algn="ctr"/>
+          </a:p>
+        </p:txBody>
+      </p:sp>
+      <p:sp>
+        <p:nvSpPr>
+          <p:cNvPr id="38" name="Rectangle 37"/>
+          <p:cNvSpPr/>
+          <p:nvPr/>
+        </p:nvSpPr>
+        <p:spPr>
+          <a:xfrm>
+            <a:off x="1205999" y="4816800"/>
+            <a:ext cx="4770001" cy="691200"/>
           </a:xfrm>
           <a:prstGeom prst="rect">
             <a:avLst/>
           </a:prstGeom>
           <a:solidFill>
             <a:srgbClr val="FFFFFF"/>
-          </a:solidFill>
-          <a:ln>
-            <a:noFill/>
-          </a:ln>
-          <a:effectLst/>
-        </p:spPr>
-        <p:txBody>
-          <a:bodyPr rtlCol="0" anchor="ctr"/>
-          <a:lstStyle/>
-          <a:p>
-            <a:pPr algn="ctr"/>
-          </a:p>
-        </p:txBody>
-      </p:sp>
-      <p:sp>
-        <p:nvSpPr>
-          <p:cNvPr id="38" name="Rectangle 37"/>
-          <p:cNvSpPr/>
-          <p:nvPr/>
-        </p:nvSpPr>
-        <p:spPr>
-          <a:xfrm>
-            <a:off x="6217200" y="3333600"/>
-            <a:ext cx="57600" cy="691200"/>
-          </a:xfrm>
-          <a:prstGeom prst="rect">
-            <a:avLst/>
-          </a:prstGeom>
-          <a:solidFill>
-            <a:srgbClr val="ED1B2F"/>
           </a:solidFill>
           <a:ln>
             <a:noFill/>
@@ -4745,8 +4745,8 @@
         </p:nvSpPr>
         <p:spPr>
           <a:xfrm>
-            <a:off x="6397200" y="3470400"/>
-            <a:ext cx="540000" cy="360000"/>
+            <a:off x="792000" y="5032800"/>
+            <a:ext cx="413999" cy="288000"/>
           </a:xfrm>
           <a:prstGeom prst="rect">
             <a:avLst/>
@@ -4759,15 +4759,15 @@
           </a:bodyPr>
           <a:lstStyle/>
           <a:p>
-            <a:pPr algn="l">
+            <a:pPr algn="ctr">
               <a:lnSpc>
                 <a:spcPct val="100000"/>
               </a:lnSpc>
             </a:pPr>
             <a:r>
-              <a:rPr sz="2200" b="1">
-                <a:solidFill>
-                  <a:srgbClr val="C01020"/>
+              <a:rPr sz="1900" b="1">
+                <a:solidFill>
+                  <a:srgbClr val="FFFFFF"/>
                 </a:solidFill>
                 <a:latin typeface="Barlow Condensed"/>
               </a:rPr>
@@ -4784,8 +4784,8 @@
         </p:nvSpPr>
         <p:spPr>
           <a:xfrm>
-            <a:off x="7045199" y="3434400"/>
-            <a:ext cx="4176001" cy="503999"/>
+            <a:off x="1385999" y="4910400"/>
+            <a:ext cx="4446001" cy="503999"/>
           </a:xfrm>
           <a:prstGeom prst="rect">
             <a:avLst/>
@@ -4816,7 +4816,7 @@
           <a:p>
             <a:pPr algn="l">
               <a:lnSpc>
-                <a:spcPct val="135000"/>
+                <a:spcPct val="140000"/>
               </a:lnSpc>
             </a:pPr>
             <a:r>
@@ -4839,44 +4839,44 @@
         </p:nvSpPr>
         <p:spPr>
           <a:xfrm>
-            <a:off x="6217200" y="4075200"/>
-            <a:ext cx="5184000" cy="691200"/>
+            <a:off x="6217200" y="4816800"/>
+            <a:ext cx="413999" cy="691200"/>
+          </a:xfrm>
+          <a:prstGeom prst="rect">
+            <a:avLst/>
+          </a:prstGeom>
+          <a:solidFill>
+            <a:srgbClr val="C01020"/>
+          </a:solidFill>
+          <a:ln>
+            <a:noFill/>
+          </a:ln>
+          <a:effectLst/>
+        </p:spPr>
+        <p:txBody>
+          <a:bodyPr rtlCol="0" anchor="ctr"/>
+          <a:lstStyle/>
+          <a:p>
+            <a:pPr algn="ctr"/>
+          </a:p>
+        </p:txBody>
+      </p:sp>
+      <p:sp>
+        <p:nvSpPr>
+          <p:cNvPr id="42" name="Rectangle 41"/>
+          <p:cNvSpPr/>
+          <p:nvPr/>
+        </p:nvSpPr>
+        <p:spPr>
+          <a:xfrm>
+            <a:off x="6631199" y="4816800"/>
+            <a:ext cx="4770001" cy="691200"/>
           </a:xfrm>
           <a:prstGeom prst="rect">
             <a:avLst/>
           </a:prstGeom>
           <a:solidFill>
             <a:srgbClr val="FFFFFF"/>
-          </a:solidFill>
-          <a:ln>
-            <a:noFill/>
-          </a:ln>
-          <a:effectLst/>
-        </p:spPr>
-        <p:txBody>
-          <a:bodyPr rtlCol="0" anchor="ctr"/>
-          <a:lstStyle/>
-          <a:p>
-            <a:pPr algn="ctr"/>
-          </a:p>
-        </p:txBody>
-      </p:sp>
-      <p:sp>
-        <p:nvSpPr>
-          <p:cNvPr id="42" name="Rectangle 41"/>
-          <p:cNvSpPr/>
-          <p:nvPr/>
-        </p:nvSpPr>
-        <p:spPr>
-          <a:xfrm>
-            <a:off x="6217200" y="4075200"/>
-            <a:ext cx="57600" cy="691200"/>
-          </a:xfrm>
-          <a:prstGeom prst="rect">
-            <a:avLst/>
-          </a:prstGeom>
-          <a:solidFill>
-            <a:srgbClr val="ED1B2F"/>
           </a:solidFill>
           <a:ln>
             <a:noFill/>
@@ -4899,8 +4899,8 @@
         </p:nvSpPr>
         <p:spPr>
           <a:xfrm>
-            <a:off x="6397200" y="4212000"/>
-            <a:ext cx="540000" cy="360000"/>
+            <a:off x="6217200" y="5032800"/>
+            <a:ext cx="413999" cy="288000"/>
           </a:xfrm>
           <a:prstGeom prst="rect">
             <a:avLst/>
@@ -4913,15 +4913,15 @@
           </a:bodyPr>
           <a:lstStyle/>
           <a:p>
-            <a:pPr algn="l">
+            <a:pPr algn="ctr">
               <a:lnSpc>
                 <a:spcPct val="100000"/>
               </a:lnSpc>
             </a:pPr>
             <a:r>
-              <a:rPr sz="2200" b="1">
-                <a:solidFill>
-                  <a:srgbClr val="C01020"/>
+              <a:rPr sz="1900" b="1">
+                <a:solidFill>
+                  <a:srgbClr val="FFFFFF"/>
                 </a:solidFill>
                 <a:latin typeface="Barlow Condensed"/>
               </a:rPr>
@@ -4938,8 +4938,8 @@
         </p:nvSpPr>
         <p:spPr>
           <a:xfrm>
-            <a:off x="7045199" y="4176000"/>
-            <a:ext cx="4176001" cy="503999"/>
+            <a:off x="6811199" y="4910400"/>
+            <a:ext cx="4446001" cy="503999"/>
           </a:xfrm>
           <a:prstGeom prst="rect">
             <a:avLst/>
@@ -4970,7 +4970,7 @@
           <a:p>
             <a:pPr algn="l">
               <a:lnSpc>
-                <a:spcPct val="135000"/>
+                <a:spcPct val="140000"/>
               </a:lnSpc>
             </a:pPr>
             <a:r>
@@ -4993,44 +4993,44 @@
         </p:nvSpPr>
         <p:spPr>
           <a:xfrm>
-            <a:off x="6217200" y="4816800"/>
-            <a:ext cx="5184000" cy="691200"/>
+            <a:off x="792000" y="5558400"/>
+            <a:ext cx="413999" cy="691200"/>
+          </a:xfrm>
+          <a:prstGeom prst="rect">
+            <a:avLst/>
+          </a:prstGeom>
+          <a:solidFill>
+            <a:srgbClr val="008080"/>
+          </a:solidFill>
+          <a:ln>
+            <a:noFill/>
+          </a:ln>
+          <a:effectLst/>
+        </p:spPr>
+        <p:txBody>
+          <a:bodyPr rtlCol="0" anchor="ctr"/>
+          <a:lstStyle/>
+          <a:p>
+            <a:pPr algn="ctr"/>
+          </a:p>
+        </p:txBody>
+      </p:sp>
+      <p:sp>
+        <p:nvSpPr>
+          <p:cNvPr id="46" name="Rectangle 45"/>
+          <p:cNvSpPr/>
+          <p:nvPr/>
+        </p:nvSpPr>
+        <p:spPr>
+          <a:xfrm>
+            <a:off x="1205999" y="5558400"/>
+            <a:ext cx="4770001" cy="691200"/>
           </a:xfrm>
           <a:prstGeom prst="rect">
             <a:avLst/>
           </a:prstGeom>
           <a:solidFill>
             <a:srgbClr val="FFFFFF"/>
-          </a:solidFill>
-          <a:ln>
-            <a:noFill/>
-          </a:ln>
-          <a:effectLst/>
-        </p:spPr>
-        <p:txBody>
-          <a:bodyPr rtlCol="0" anchor="ctr"/>
-          <a:lstStyle/>
-          <a:p>
-            <a:pPr algn="ctr"/>
-          </a:p>
-        </p:txBody>
-      </p:sp>
-      <p:sp>
-        <p:nvSpPr>
-          <p:cNvPr id="46" name="Rectangle 45"/>
-          <p:cNvSpPr/>
-          <p:nvPr/>
-        </p:nvSpPr>
-        <p:spPr>
-          <a:xfrm>
-            <a:off x="6217200" y="4816800"/>
-            <a:ext cx="57600" cy="691200"/>
-          </a:xfrm>
-          <a:prstGeom prst="rect">
-            <a:avLst/>
-          </a:prstGeom>
-          <a:solidFill>
-            <a:srgbClr val="ED1B2F"/>
           </a:solidFill>
           <a:ln>
             <a:noFill/>
@@ -5053,8 +5053,8 @@
         </p:nvSpPr>
         <p:spPr>
           <a:xfrm>
-            <a:off x="6397200" y="4953600"/>
-            <a:ext cx="540000" cy="360000"/>
+            <a:off x="792000" y="5774400"/>
+            <a:ext cx="413999" cy="288000"/>
           </a:xfrm>
           <a:prstGeom prst="rect">
             <a:avLst/>
@@ -5067,15 +5067,15 @@
           </a:bodyPr>
           <a:lstStyle/>
           <a:p>
-            <a:pPr algn="l">
+            <a:pPr algn="ctr">
               <a:lnSpc>
                 <a:spcPct val="100000"/>
               </a:lnSpc>
             </a:pPr>
             <a:r>
-              <a:rPr sz="2200" b="1">
-                <a:solidFill>
-                  <a:srgbClr val="C01020"/>
+              <a:rPr sz="1900" b="1">
+                <a:solidFill>
+                  <a:srgbClr val="FFFFFF"/>
                 </a:solidFill>
                 <a:latin typeface="Barlow Condensed"/>
               </a:rPr>
@@ -5092,8 +5092,8 @@
         </p:nvSpPr>
         <p:spPr>
           <a:xfrm>
-            <a:off x="7045199" y="4917600"/>
-            <a:ext cx="4176001" cy="503999"/>
+            <a:off x="1385999" y="5652000"/>
+            <a:ext cx="4446001" cy="503999"/>
           </a:xfrm>
           <a:prstGeom prst="rect">
             <a:avLst/>
@@ -5124,7 +5124,7 @@
           <a:p>
             <a:pPr algn="l">
               <a:lnSpc>
-                <a:spcPct val="135000"/>
+                <a:spcPct val="140000"/>
               </a:lnSpc>
             </a:pPr>
             <a:r>
@@ -5148,43 +5148,43 @@
         <p:spPr>
           <a:xfrm>
             <a:off x="6217200" y="5558400"/>
-            <a:ext cx="5184000" cy="691200"/>
+            <a:ext cx="413999" cy="691200"/>
+          </a:xfrm>
+          <a:prstGeom prst="rect">
+            <a:avLst/>
+          </a:prstGeom>
+          <a:solidFill>
+            <a:srgbClr val="C01020"/>
+          </a:solidFill>
+          <a:ln>
+            <a:noFill/>
+          </a:ln>
+          <a:effectLst/>
+        </p:spPr>
+        <p:txBody>
+          <a:bodyPr rtlCol="0" anchor="ctr"/>
+          <a:lstStyle/>
+          <a:p>
+            <a:pPr algn="ctr"/>
+          </a:p>
+        </p:txBody>
+      </p:sp>
+      <p:sp>
+        <p:nvSpPr>
+          <p:cNvPr id="50" name="Rectangle 49"/>
+          <p:cNvSpPr/>
+          <p:nvPr/>
+        </p:nvSpPr>
+        <p:spPr>
+          <a:xfrm>
+            <a:off x="6631199" y="5558400"/>
+            <a:ext cx="4770001" cy="691200"/>
           </a:xfrm>
           <a:prstGeom prst="rect">
             <a:avLst/>
           </a:prstGeom>
           <a:solidFill>
             <a:srgbClr val="FFFFFF"/>
-          </a:solidFill>
-          <a:ln>
-            <a:noFill/>
-          </a:ln>
-          <a:effectLst/>
-        </p:spPr>
-        <p:txBody>
-          <a:bodyPr rtlCol="0" anchor="ctr"/>
-          <a:lstStyle/>
-          <a:p>
-            <a:pPr algn="ctr"/>
-          </a:p>
-        </p:txBody>
-      </p:sp>
-      <p:sp>
-        <p:nvSpPr>
-          <p:cNvPr id="50" name="Rectangle 49"/>
-          <p:cNvSpPr/>
-          <p:nvPr/>
-        </p:nvSpPr>
-        <p:spPr>
-          <a:xfrm>
-            <a:off x="6217200" y="5558400"/>
-            <a:ext cx="57600" cy="691200"/>
-          </a:xfrm>
-          <a:prstGeom prst="rect">
-            <a:avLst/>
-          </a:prstGeom>
-          <a:solidFill>
-            <a:srgbClr val="ED1B2F"/>
           </a:solidFill>
           <a:ln>
             <a:noFill/>
@@ -5207,8 +5207,8 @@
         </p:nvSpPr>
         <p:spPr>
           <a:xfrm>
-            <a:off x="6397200" y="5695200"/>
-            <a:ext cx="540000" cy="360000"/>
+            <a:off x="6217200" y="5774400"/>
+            <a:ext cx="413999" cy="288000"/>
           </a:xfrm>
           <a:prstGeom prst="rect">
             <a:avLst/>
@@ -5221,15 +5221,15 @@
           </a:bodyPr>
           <a:lstStyle/>
           <a:p>
-            <a:pPr algn="l">
+            <a:pPr algn="ctr">
               <a:lnSpc>
                 <a:spcPct val="100000"/>
               </a:lnSpc>
             </a:pPr>
             <a:r>
-              <a:rPr sz="2200" b="1">
-                <a:solidFill>
-                  <a:srgbClr val="C01020"/>
+              <a:rPr sz="1900" b="1">
+                <a:solidFill>
+                  <a:srgbClr val="FFFFFF"/>
                 </a:solidFill>
                 <a:latin typeface="Barlow Condensed"/>
               </a:rPr>
@@ -5246,8 +5246,8 @@
         </p:nvSpPr>
         <p:spPr>
           <a:xfrm>
-            <a:off x="7045199" y="5659200"/>
-            <a:ext cx="4176001" cy="503999"/>
+            <a:off x="6811199" y="5652000"/>
+            <a:ext cx="4446001" cy="503999"/>
           </a:xfrm>
           <a:prstGeom prst="rect">
             <a:avLst/>
@@ -5278,7 +5278,7 @@
           <a:p>
             <a:pPr algn="l">
               <a:lnSpc>
-                <a:spcPct val="135000"/>
+                <a:spcPct val="140000"/>
               </a:lnSpc>
             </a:pPr>
             <a:r>

--- a/outils/affiches/presentation-testing-event.pptx
+++ b/outils/affiches/presentation-testing-event.pptx
@@ -5272,7 +5272,7 @@
                 </a:solidFill>
                 <a:latin typeface="Barlow Condensed"/>
               </a:rPr>
-              <a:t>Vidéo TESTY — libre service</a:t>
+              <a:t>Mini-Série TESTY</a:t>
             </a:r>
           </a:p>
           <a:p>
